--- a/submission/deck/PolicyFuzz-Pitch-Draft.pptx
+++ b/submission/deck/PolicyFuzz-Pitch-Draft.pptx
@@ -2,21 +2,21 @@
 <file path=ppt/presentation.xml><?xml version="1.0" encoding="utf-8"?>
 <p:presentation xmlns:p="http://schemas.openxmlformats.org/presentationml/2006/main">
   <p:sldMasterIdLst>
-    <p:sldMasterId xmlns:r="http://schemas.openxmlformats.org/officeDocument/2006/relationships" id="2147483648" r:id="Ra0a1175fb6d544b8"/>
+    <p:sldMasterId xmlns:r="http://schemas.openxmlformats.org/officeDocument/2006/relationships" id="2147483648" r:id="R68a50fb1041a4517"/>
   </p:sldMasterIdLst>
   <p:notesMasterIdLst>
-    <p:notesMasterId xmlns:r="http://schemas.openxmlformats.org/officeDocument/2006/relationships" r:id="R8c281c3e069642fa"/>
+    <p:notesMasterId xmlns:r="http://schemas.openxmlformats.org/officeDocument/2006/relationships" r:id="R090b698c25f243ec"/>
   </p:notesMasterIdLst>
   <p:sldIdLst>
-    <p:sldId xmlns:r="http://schemas.openxmlformats.org/officeDocument/2006/relationships" id="256" r:id="R91e4ac0f30c64aeb"/>
-    <p:sldId xmlns:r="http://schemas.openxmlformats.org/officeDocument/2006/relationships" id="257" r:id="R28aaf402cd4b41ef"/>
-    <p:sldId xmlns:r="http://schemas.openxmlformats.org/officeDocument/2006/relationships" id="258" r:id="Rc4b768cdb0ff4183"/>
-    <p:sldId xmlns:r="http://schemas.openxmlformats.org/officeDocument/2006/relationships" id="259" r:id="R780ac531285541af"/>
-    <p:sldId xmlns:r="http://schemas.openxmlformats.org/officeDocument/2006/relationships" id="260" r:id="Rdca767b362784f36"/>
-    <p:sldId xmlns:r="http://schemas.openxmlformats.org/officeDocument/2006/relationships" id="261" r:id="R740c359cfdc24201"/>
-    <p:sldId xmlns:r="http://schemas.openxmlformats.org/officeDocument/2006/relationships" id="262" r:id="R6de24ba56b834d8d"/>
-    <p:sldId xmlns:r="http://schemas.openxmlformats.org/officeDocument/2006/relationships" id="263" r:id="R62cd59835c384293"/>
-    <p:sldId xmlns:r="http://schemas.openxmlformats.org/officeDocument/2006/relationships" id="264" r:id="R61d6dcafa3524cbb"/>
+    <p:sldId xmlns:r="http://schemas.openxmlformats.org/officeDocument/2006/relationships" id="256" r:id="R4de847c2c8e54078"/>
+    <p:sldId xmlns:r="http://schemas.openxmlformats.org/officeDocument/2006/relationships" id="257" r:id="R7fe8070bc00f4cd9"/>
+    <p:sldId xmlns:r="http://schemas.openxmlformats.org/officeDocument/2006/relationships" id="258" r:id="Re2df77f0498d4e3a"/>
+    <p:sldId xmlns:r="http://schemas.openxmlformats.org/officeDocument/2006/relationships" id="259" r:id="R3442d6bd086a4228"/>
+    <p:sldId xmlns:r="http://schemas.openxmlformats.org/officeDocument/2006/relationships" id="260" r:id="Re21bcf75a66d4358"/>
+    <p:sldId xmlns:r="http://schemas.openxmlformats.org/officeDocument/2006/relationships" id="261" r:id="Rd42042568ba84472"/>
+    <p:sldId xmlns:r="http://schemas.openxmlformats.org/officeDocument/2006/relationships" id="262" r:id="R62247b7e0ab84c5d"/>
+    <p:sldId xmlns:r="http://schemas.openxmlformats.org/officeDocument/2006/relationships" id="263" r:id="Rcd86860ee8a0454a"/>
+    <p:sldId xmlns:r="http://schemas.openxmlformats.org/officeDocument/2006/relationships" id="264" r:id="R80a76c16c5ad47de"/>
   </p:sldIdLst>
   <p:sldSz cx="12192000" cy="6858000"/>
   <p:notesSz cx="6858000" cy="9144000"/>
@@ -750,12 +750,12 @@
           <a:lstStyle xmlns:a="http://schemas.openxmlformats.org/drawingml/2006/main"/>
           <a:p xmlns:a="http://schemas.openxmlformats.org/drawingml/2006/main">
             <a:r>
-              <a:t>Explain that the agentic behavior is bounded by a single targeted cycle.</a:t>
-            </a:r>
-          </a:p>
-          <a:p xmlns:a="http://schemas.openxmlformats.org/drawingml/2006/main">
-            <a:r>
-              <a:t>If coverage remains insufficient, the workflow stops rather than expanding without limit.</a:t>
+              <a:t>The current cached rehearsal satisfies minimum coverage in the initial provisional suite, so it freezes without adaptation.</a:t>
+            </a:r>
+          </a:p>
+          <a:p xmlns:a="http://schemas.openxmlformats.org/drawingml/2006/main">
+            <a:r>
+              <a:t>One targeted cycle remains the upper bound when coverage is missing; it is not a mandatory step.</a:t>
             </a:r>
           </a:p>
           <a:p xmlns:a="http://schemas.openxmlformats.org/drawingml/2006/main">
@@ -770,7 +770,7 @@
           </a:p>
           <a:p xmlns:a="http://schemas.openxmlformats.org/drawingml/2006/main">
             <a:r>
-              <a:t>- docs/superpowers/plans/2026-09-04-policyfuzz-implementation.md — Tasks 9 and 24</a:t>
+              <a:t>- samples/cached-demo/run-record.json — scenario suite statistics and coverage</a:t>
             </a:r>
           </a:p>
           <a:p xmlns:a="http://schemas.openxmlformats.org/drawingml/2006/main">
@@ -955,12 +955,12 @@
           <a:lstStyle xmlns:a="http://schemas.openxmlformats.org/drawingml/2006/main"/>
           <a:p xmlns:a="http://schemas.openxmlformats.org/drawingml/2006/main">
             <a:r>
-              <a:t>Describe these as synthetic planned development cases, not observed findings.</a:t>
-            </a:r>
-          </a:p>
-          <a:p xmlns:a="http://schemas.openxmlformats.org/drawingml/2006/main">
-            <a:r>
-              <a:t>The amount facts instantiate the approved defect definitions; final witnesses, traces, and policy-span citations remain capture dependencies.</a:t>
+              <a:t>Describe these as findings in the current public cached rehearsal, not frozen benchmark claims.</a:t>
+            </a:r>
+          </a:p>
+          <a:p xmlns:a="http://schemas.openxmlformats.org/drawingml/2006/main">
+            <a:r>
+              <a:t>Exact browser witnesses, traces, and policy-span citations remain capture dependencies.</a:t>
             </a:r>
           </a:p>
           <a:p xmlns:a="http://schemas.openxmlformats.org/drawingml/2006/main">
@@ -975,12 +975,12 @@
           </a:p>
           <a:p xmlns:a="http://schemas.openxmlformats.org/drawingml/2006/main">
             <a:r>
-              <a:t>- docs/superpowers/specs/2026-09-04-policyfuzz-design.md — §12.1 development demonstration cases</a:t>
-            </a:r>
-          </a:p>
-          <a:p xmlns:a="http://schemas.openxmlformats.org/drawingml/2006/main">
-            <a:r>
-              <a:t>- docs/superpowers/plans/2026-09-04-policyfuzz-implementation.md — Task 21 fixture contract and Task 24, slide 6</a:t>
+              <a:t>- samples/cached-demo/run-record.json — baseline finding report and authored decisions</a:t>
+            </a:r>
+          </a:p>
+          <a:p xmlns:a="http://schemas.openxmlformats.org/drawingml/2006/main">
+            <a:r>
+              <a:t>- samples/cached-demo/summary.json — baseline finding count and cached provenance</a:t>
             </a:r>
           </a:p>
           <a:p xmlns:a="http://schemas.openxmlformats.org/drawingml/2006/main">
@@ -1055,12 +1055,12 @@
           <a:lstStyle xmlns:a="http://schemas.openxmlformats.org/drawingml/2006/main"/>
           <a:p xmlns:a="http://schemas.openxmlformats.org/drawingml/2006/main">
             <a:r>
-              <a:t>Do not present placeholder values as measurements.</a:t>
-            </a:r>
-          </a:p>
-          <a:p xmlns:a="http://schemas.openxmlformats.org/drawingml/2006/main">
-            <a:r>
-              <a:t>Explain the evidence chain and disclose the blind candidate's late seal, delegated-agent authorship, pending human review, and scoring ineligibility.</a:t>
+              <a:t>These are measured values from the current public cached rehearsal record, not final verified metrics.</a:t>
+            </a:r>
+          </a:p>
+          <a:p xmlns:a="http://schemas.openxmlformats.org/drawingml/2006/main">
+            <a:r>
+              <a:t>Keep synthetic, cached, scripted, and blind-ineligible labels visible; final claims still require Gate B, freeze, capture, and human review.</a:t>
             </a:r>
           </a:p>
           <a:p xmlns:a="http://schemas.openxmlformats.org/drawingml/2006/main">
@@ -1075,17 +1075,12 @@
           </a:p>
           <a:p xmlns:a="http://schemas.openxmlformats.org/drawingml/2006/main">
             <a:r>
-              <a:t>- docs/superpowers/plans/2026-09-04-policyfuzz-implementation.md — Gate B and Task 24, steps 1–2</a:t>
-            </a:r>
-          </a:p>
-          <a:p xmlns:a="http://schemas.openxmlformats.org/drawingml/2006/main">
-            <a:r>
-              <a:t>- docs/superpowers/specs/2026-09-04-policyfuzz-design.md — §§12.2–12.4 and 18</a:t>
-            </a:r>
-          </a:p>
-          <a:p xmlns:a="http://schemas.openxmlformats.org/drawingml/2006/main">
-            <a:r>
-              <a:t>- submission/evidence/benchmark-v2/README.md</a:t>
+              <a:t>- samples/cached-demo/summary.json</a:t>
+            </a:r>
+          </a:p>
+          <a:p xmlns:a="http://schemas.openxmlformats.org/drawingml/2006/main">
+            <a:r>
+              <a:t>- samples/cached-demo/run-record.json</a:t>
             </a:r>
           </a:p>
           <a:p xmlns:a="http://schemas.openxmlformats.org/drawingml/2006/main">
@@ -1373,7 +1368,7 @@
   </p:cSld>
   <p:clrMap bg1="lt1" tx1="dk1" bg2="lt2" tx2="dk2" accent1="accent1" accent2="accent2" accent3="accent3" accent4="accent4" accent5="accent5" accent6="accent6" hlink="hlink" folHlink="folHlink"/>
   <p:sldLayoutIdLst>
-    <p:sldLayoutId xmlns:r="http://schemas.openxmlformats.org/officeDocument/2006/relationships" id="2147483649" r:id="Rba581d740bb04b43"/>
+    <p:sldLayoutId xmlns:r="http://schemas.openxmlformats.org/officeDocument/2006/relationships" id="2147483649" r:id="R6e7b9c9e910e4061"/>
   </p:sldLayoutIdLst>
   <p:txStyles>
     <p:titleStyle>
@@ -1924,7 +1919,7 @@
           <p:cNvPr id="9" name="">
             <a:extLst xmlns:a="http://schemas.openxmlformats.org/drawingml/2006/main">
               <a:ext uri="{FF2B5EF4-FFF2-40B4-BE49-F238E27FC236}">
-                <a16:creationId xmlns:a16="http://schemas.microsoft.com/office/drawing/2014/main" id="{DE6B0869-5F03-4A4C-AF90-FC3EEEF2A80F}"/>
+                <a16:creationId xmlns:a16="http://schemas.microsoft.com/office/drawing/2014/main" id="{C0760335-883D-487C-9350-6A57B3E30157}"/>
               </a:ext>
             </a:extLst>
           </p:cNvPr>
@@ -1955,7 +1950,7 @@
           <p:cNvPr id="2" name="">
             <a:extLst xmlns:a="http://schemas.openxmlformats.org/drawingml/2006/main">
               <a:ext uri="{FF2B5EF4-FFF2-40B4-BE49-F238E27FC236}">
-                <a16:creationId xmlns:a16="http://schemas.microsoft.com/office/drawing/2014/main" id="{EC679253-5BAD-4445-ABCB-AAF14E0D265E}"/>
+                <a16:creationId xmlns:a16="http://schemas.microsoft.com/office/drawing/2014/main" id="{94BF83B8-3C21-4938-B841-C95EAB543030}"/>
               </a:ext>
             </a:extLst>
           </p:cNvPr>
@@ -1986,7 +1981,7 @@
           <p:cNvPr id="3" name="">
             <a:extLst xmlns:a="http://schemas.openxmlformats.org/drawingml/2006/main">
               <a:ext uri="{FF2B5EF4-FFF2-40B4-BE49-F238E27FC236}">
-                <a16:creationId xmlns:a16="http://schemas.microsoft.com/office/drawing/2014/main" id="{E110D5C8-620A-4E74-BE1D-F3D40C2180D8}"/>
+                <a16:creationId xmlns:a16="http://schemas.microsoft.com/office/drawing/2014/main" id="{983FF10F-9235-487A-ACC6-42A921EAF6AA}"/>
               </a:ext>
             </a:extLst>
           </p:cNvPr>
@@ -2036,7 +2031,7 @@
           <p:cNvPr id="4" name="">
             <a:extLst xmlns:a="http://schemas.openxmlformats.org/drawingml/2006/main">
               <a:ext uri="{FF2B5EF4-FFF2-40B4-BE49-F238E27FC236}">
-                <a16:creationId xmlns:a16="http://schemas.microsoft.com/office/drawing/2014/main" id="{C3C1C58D-C78B-4D20-A1A6-B2C06B3C3034}"/>
+                <a16:creationId xmlns:a16="http://schemas.microsoft.com/office/drawing/2014/main" id="{266D18DA-DB29-4497-91D0-645C7612AB85}"/>
               </a:ext>
             </a:extLst>
           </p:cNvPr>
@@ -2103,7 +2098,7 @@
           <p:cNvPr id="5" name="">
             <a:extLst xmlns:a="http://schemas.openxmlformats.org/drawingml/2006/main">
               <a:ext uri="{FF2B5EF4-FFF2-40B4-BE49-F238E27FC236}">
-                <a16:creationId xmlns:a16="http://schemas.microsoft.com/office/drawing/2014/main" id="{B5335A6B-313B-480C-9BAF-68D64616C118}"/>
+                <a16:creationId xmlns:a16="http://schemas.microsoft.com/office/drawing/2014/main" id="{B93E05DB-DFC7-48CD-AA69-BD0149560F9D}"/>
               </a:ext>
             </a:extLst>
           </p:cNvPr>
@@ -2153,7 +2148,7 @@
           <p:cNvPr id="6" name="">
             <a:extLst xmlns:a="http://schemas.openxmlformats.org/drawingml/2006/main">
               <a:ext uri="{FF2B5EF4-FFF2-40B4-BE49-F238E27FC236}">
-                <a16:creationId xmlns:a16="http://schemas.microsoft.com/office/drawing/2014/main" id="{921D98B0-D068-458F-83DB-5861350B1B38}"/>
+                <a16:creationId xmlns:a16="http://schemas.microsoft.com/office/drawing/2014/main" id="{4C6C69BB-B029-4D80-A540-B94A79F6982D}"/>
               </a:ext>
             </a:extLst>
           </p:cNvPr>
@@ -2207,7 +2202,7 @@
           <p:cNvPr id="7" name="">
             <a:extLst xmlns:a="http://schemas.openxmlformats.org/drawingml/2006/main">
               <a:ext uri="{FF2B5EF4-FFF2-40B4-BE49-F238E27FC236}">
-                <a16:creationId xmlns:a16="http://schemas.microsoft.com/office/drawing/2014/main" id="{E0D95EAA-283B-431D-A29D-5B4CC47F7E99}"/>
+                <a16:creationId xmlns:a16="http://schemas.microsoft.com/office/drawing/2014/main" id="{82F4D032-5505-4E33-815D-F80840495CA5}"/>
               </a:ext>
             </a:extLst>
           </p:cNvPr>
@@ -2257,7 +2252,7 @@
           <p:cNvPr id="8" name="">
             <a:extLst xmlns:a="http://schemas.openxmlformats.org/drawingml/2006/main">
               <a:ext uri="{FF2B5EF4-FFF2-40B4-BE49-F238E27FC236}">
-                <a16:creationId xmlns:a16="http://schemas.microsoft.com/office/drawing/2014/main" id="{AE8C7CBE-D0D5-4CCF-905E-F3B7D7823A82}"/>
+                <a16:creationId xmlns:a16="http://schemas.microsoft.com/office/drawing/2014/main" id="{0E90278E-D8CF-4A4B-BA11-F5C6CD37BE48}"/>
               </a:ext>
             </a:extLst>
           </p:cNvPr>
@@ -2322,7 +2317,7 @@
     </p:spTree>
     <p:extLst>
       <p:ext uri="{BB962C8B-B14F-4D97-AF65-F5344CB8AC3E}">
-        <p14:creationId xmlns:p14="http://schemas.microsoft.com/office/powerpoint/2010/main" val="1382384054"/>
+        <p14:creationId xmlns:p14="http://schemas.microsoft.com/office/powerpoint/2010/main" val="1953858730"/>
       </p:ext>
     </p:extLst>
   </p:cSld>
@@ -2353,7 +2348,7 @@
           <p:cNvPr id="21" name="">
             <a:extLst xmlns:a="http://schemas.openxmlformats.org/drawingml/2006/main">
               <a:ext uri="{FF2B5EF4-FFF2-40B4-BE49-F238E27FC236}">
-                <a16:creationId xmlns:a16="http://schemas.microsoft.com/office/drawing/2014/main" id="{2F3E1253-C919-42B4-B2B8-F10D63E4DC65}"/>
+                <a16:creationId xmlns:a16="http://schemas.microsoft.com/office/drawing/2014/main" id="{51E84126-91B2-40AE-8586-3AE9D70E5BA8}"/>
               </a:ext>
             </a:extLst>
           </p:cNvPr>
@@ -2384,7 +2379,7 @@
           <p:cNvPr id="2" name="">
             <a:extLst xmlns:a="http://schemas.openxmlformats.org/drawingml/2006/main">
               <a:ext uri="{FF2B5EF4-FFF2-40B4-BE49-F238E27FC236}">
-                <a16:creationId xmlns:a16="http://schemas.microsoft.com/office/drawing/2014/main" id="{D5D5A770-6EF7-415A-9C12-6F1BDC6F7D65}"/>
+                <a16:creationId xmlns:a16="http://schemas.microsoft.com/office/drawing/2014/main" id="{6BEC7DA0-B63C-42B7-AE1A-9A405B0E93EC}"/>
               </a:ext>
             </a:extLst>
           </p:cNvPr>
@@ -2434,7 +2429,7 @@
           <p:cNvPr id="3" name="">
             <a:extLst xmlns:a="http://schemas.openxmlformats.org/drawingml/2006/main">
               <a:ext uri="{FF2B5EF4-FFF2-40B4-BE49-F238E27FC236}">
-                <a16:creationId xmlns:a16="http://schemas.microsoft.com/office/drawing/2014/main" id="{0EC6FD85-4161-4D05-8DAD-FCFC195F942E}"/>
+                <a16:creationId xmlns:a16="http://schemas.microsoft.com/office/drawing/2014/main" id="{8C9C08F2-836A-457E-9742-7ABEE2887D56}"/>
               </a:ext>
             </a:extLst>
           </p:cNvPr>
@@ -2484,7 +2479,7 @@
           <p:cNvPr id="4" name="">
             <a:extLst xmlns:a="http://schemas.openxmlformats.org/drawingml/2006/main">
               <a:ext uri="{FF2B5EF4-FFF2-40B4-BE49-F238E27FC236}">
-                <a16:creationId xmlns:a16="http://schemas.microsoft.com/office/drawing/2014/main" id="{06736764-4106-4881-8FD3-ACE7993DAF62}"/>
+                <a16:creationId xmlns:a16="http://schemas.microsoft.com/office/drawing/2014/main" id="{70966F64-8ED5-445D-A43C-A67A42C448DD}"/>
               </a:ext>
             </a:extLst>
           </p:cNvPr>
@@ -2515,7 +2510,7 @@
           <p:cNvPr id="5" name="">
             <a:extLst xmlns:a="http://schemas.openxmlformats.org/drawingml/2006/main">
               <a:ext uri="{FF2B5EF4-FFF2-40B4-BE49-F238E27FC236}">
-                <a16:creationId xmlns:a16="http://schemas.microsoft.com/office/drawing/2014/main" id="{353C118C-D7BA-45CB-8B28-6D8F8B8F4267}"/>
+                <a16:creationId xmlns:a16="http://schemas.microsoft.com/office/drawing/2014/main" id="{AE78F31F-0F8B-4AD5-AAF7-984E0E4B066F}"/>
               </a:ext>
             </a:extLst>
           </p:cNvPr>
@@ -2565,7 +2560,7 @@
           <p:cNvPr id="6" name="">
             <a:extLst xmlns:a="http://schemas.openxmlformats.org/drawingml/2006/main">
               <a:ext uri="{FF2B5EF4-FFF2-40B4-BE49-F238E27FC236}">
-                <a16:creationId xmlns:a16="http://schemas.microsoft.com/office/drawing/2014/main" id="{32E187BC-41CD-42CA-AE7B-AAEF76A97973}"/>
+                <a16:creationId xmlns:a16="http://schemas.microsoft.com/office/drawing/2014/main" id="{E3982C7B-395B-4D36-84B7-88ECFD7CDD0B}"/>
               </a:ext>
             </a:extLst>
           </p:cNvPr>
@@ -2615,7 +2610,7 @@
           <p:cNvPr id="7" name="">
             <a:extLst xmlns:a="http://schemas.openxmlformats.org/drawingml/2006/main">
               <a:ext uri="{FF2B5EF4-FFF2-40B4-BE49-F238E27FC236}">
-                <a16:creationId xmlns:a16="http://schemas.microsoft.com/office/drawing/2014/main" id="{78527DB5-08E8-4C91-92F6-AAC9DD6B4366}"/>
+                <a16:creationId xmlns:a16="http://schemas.microsoft.com/office/drawing/2014/main" id="{04FF34CF-49FB-4F32-87F3-9D7853376150}"/>
               </a:ext>
             </a:extLst>
           </p:cNvPr>
@@ -2665,7 +2660,7 @@
           <p:cNvPr id="8" name="">
             <a:extLst xmlns:a="http://schemas.openxmlformats.org/drawingml/2006/main">
               <a:ext uri="{FF2B5EF4-FFF2-40B4-BE49-F238E27FC236}">
-                <a16:creationId xmlns:a16="http://schemas.microsoft.com/office/drawing/2014/main" id="{98E51D87-7F34-4AC3-B3DE-A206D9A1A8EC}"/>
+                <a16:creationId xmlns:a16="http://schemas.microsoft.com/office/drawing/2014/main" id="{46C80B49-2DD8-48EF-9288-2EA74DCF2B79}"/>
               </a:ext>
             </a:extLst>
           </p:cNvPr>
@@ -2715,7 +2710,7 @@
           <p:cNvPr id="9" name="">
             <a:extLst xmlns:a="http://schemas.openxmlformats.org/drawingml/2006/main">
               <a:ext uri="{FF2B5EF4-FFF2-40B4-BE49-F238E27FC236}">
-                <a16:creationId xmlns:a16="http://schemas.microsoft.com/office/drawing/2014/main" id="{06EC0855-26C5-4EE8-9409-746760D473D2}"/>
+                <a16:creationId xmlns:a16="http://schemas.microsoft.com/office/drawing/2014/main" id="{5795DAA6-90EE-4043-9D4A-50FAC49D211D}"/>
               </a:ext>
             </a:extLst>
           </p:cNvPr>
@@ -2765,7 +2760,7 @@
           <p:cNvPr id="10" name="">
             <a:extLst xmlns:a="http://schemas.openxmlformats.org/drawingml/2006/main">
               <a:ext uri="{FF2B5EF4-FFF2-40B4-BE49-F238E27FC236}">
-                <a16:creationId xmlns:a16="http://schemas.microsoft.com/office/drawing/2014/main" id="{1F28DCB6-E000-4E91-97FB-8977DD3483BF}"/>
+                <a16:creationId xmlns:a16="http://schemas.microsoft.com/office/drawing/2014/main" id="{7AC176F8-3EBA-4450-8409-5412BAA69EE4}"/>
               </a:ext>
             </a:extLst>
           </p:cNvPr>
@@ -2819,7 +2814,7 @@
           <p:cNvPr id="11" name="">
             <a:extLst xmlns:a="http://schemas.openxmlformats.org/drawingml/2006/main">
               <a:ext uri="{FF2B5EF4-FFF2-40B4-BE49-F238E27FC236}">
-                <a16:creationId xmlns:a16="http://schemas.microsoft.com/office/drawing/2014/main" id="{19AEC533-B5C4-4BE7-A1D6-8EBBFA92FC69}"/>
+                <a16:creationId xmlns:a16="http://schemas.microsoft.com/office/drawing/2014/main" id="{78DE4A21-11F5-4B09-86E4-CE8188A0F8AC}"/>
               </a:ext>
             </a:extLst>
           </p:cNvPr>
@@ -2850,7 +2845,7 @@
           <p:cNvPr id="12" name="">
             <a:extLst xmlns:a="http://schemas.openxmlformats.org/drawingml/2006/main">
               <a:ext uri="{FF2B5EF4-FFF2-40B4-BE49-F238E27FC236}">
-                <a16:creationId xmlns:a16="http://schemas.microsoft.com/office/drawing/2014/main" id="{CEBFB479-A620-47F3-AED3-AB3FF0D0FE07}"/>
+                <a16:creationId xmlns:a16="http://schemas.microsoft.com/office/drawing/2014/main" id="{DBEB6B7E-38C4-4B04-BD92-60F9F15A6E28}"/>
               </a:ext>
             </a:extLst>
           </p:cNvPr>
@@ -2904,7 +2899,7 @@
           <p:cNvPr id="13" name="">
             <a:extLst xmlns:a="http://schemas.openxmlformats.org/drawingml/2006/main">
               <a:ext uri="{FF2B5EF4-FFF2-40B4-BE49-F238E27FC236}">
-                <a16:creationId xmlns:a16="http://schemas.microsoft.com/office/drawing/2014/main" id="{7F7834EB-AE2E-47C6-8DF3-CFA32BCC118E}"/>
+                <a16:creationId xmlns:a16="http://schemas.microsoft.com/office/drawing/2014/main" id="{A7342C08-12E8-4EC8-A08F-44954B64C3C1}"/>
               </a:ext>
             </a:extLst>
           </p:cNvPr>
@@ -2954,7 +2949,7 @@
           <p:cNvPr id="14" name="">
             <a:extLst xmlns:a="http://schemas.openxmlformats.org/drawingml/2006/main">
               <a:ext uri="{FF2B5EF4-FFF2-40B4-BE49-F238E27FC236}">
-                <a16:creationId xmlns:a16="http://schemas.microsoft.com/office/drawing/2014/main" id="{88F7C963-0229-4CD0-B29D-C0E299477C5B}"/>
+                <a16:creationId xmlns:a16="http://schemas.microsoft.com/office/drawing/2014/main" id="{0D30ED82-16EC-4299-841B-FAD257DE0810}"/>
               </a:ext>
             </a:extLst>
           </p:cNvPr>
@@ -3004,7 +2999,7 @@
           <p:cNvPr id="15" name="">
             <a:extLst xmlns:a="http://schemas.openxmlformats.org/drawingml/2006/main">
               <a:ext uri="{FF2B5EF4-FFF2-40B4-BE49-F238E27FC236}">
-                <a16:creationId xmlns:a16="http://schemas.microsoft.com/office/drawing/2014/main" id="{8D4B838C-0B57-457D-9BB0-87FC36D04DFE}"/>
+                <a16:creationId xmlns:a16="http://schemas.microsoft.com/office/drawing/2014/main" id="{85721BEE-0B57-476E-9C7F-EDB5966EC335}"/>
               </a:ext>
             </a:extLst>
           </p:cNvPr>
@@ -3058,7 +3053,7 @@
           <p:cNvPr id="16" name="">
             <a:extLst xmlns:a="http://schemas.openxmlformats.org/drawingml/2006/main">
               <a:ext uri="{FF2B5EF4-FFF2-40B4-BE49-F238E27FC236}">
-                <a16:creationId xmlns:a16="http://schemas.microsoft.com/office/drawing/2014/main" id="{78EC445C-7A60-45C5-B582-8577C50DA772}"/>
+                <a16:creationId xmlns:a16="http://schemas.microsoft.com/office/drawing/2014/main" id="{B19EE527-391B-4116-A1C6-40CF1396DC5B}"/>
               </a:ext>
             </a:extLst>
           </p:cNvPr>
@@ -3108,7 +3103,7 @@
           <p:cNvPr id="17" name="">
             <a:extLst xmlns:a="http://schemas.openxmlformats.org/drawingml/2006/main">
               <a:ext uri="{FF2B5EF4-FFF2-40B4-BE49-F238E27FC236}">
-                <a16:creationId xmlns:a16="http://schemas.microsoft.com/office/drawing/2014/main" id="{2E7C5689-CDD2-40F3-A405-7384D859A606}"/>
+                <a16:creationId xmlns:a16="http://schemas.microsoft.com/office/drawing/2014/main" id="{A89E0BE2-7C46-4360-A3DA-659E3C16FB42}"/>
               </a:ext>
             </a:extLst>
           </p:cNvPr>
@@ -3158,7 +3153,7 @@
           <p:cNvPr id="18" name="">
             <a:extLst xmlns:a="http://schemas.openxmlformats.org/drawingml/2006/main">
               <a:ext uri="{FF2B5EF4-FFF2-40B4-BE49-F238E27FC236}">
-                <a16:creationId xmlns:a16="http://schemas.microsoft.com/office/drawing/2014/main" id="{68EE5DD9-58F5-4AC9-8B2D-20B4A081E676}"/>
+                <a16:creationId xmlns:a16="http://schemas.microsoft.com/office/drawing/2014/main" id="{818C34B7-BDE3-419E-87A4-B40B31F79E21}"/>
               </a:ext>
             </a:extLst>
           </p:cNvPr>
@@ -3212,7 +3207,7 @@
           <p:cNvPr id="19" name="">
             <a:extLst xmlns:a="http://schemas.openxmlformats.org/drawingml/2006/main">
               <a:ext uri="{FF2B5EF4-FFF2-40B4-BE49-F238E27FC236}">
-                <a16:creationId xmlns:a16="http://schemas.microsoft.com/office/drawing/2014/main" id="{7AA38B22-B471-4654-B3F6-F33E3FBB89E3}"/>
+                <a16:creationId xmlns:a16="http://schemas.microsoft.com/office/drawing/2014/main" id="{89EE628E-BCEB-40A3-9602-40101B5785A8}"/>
               </a:ext>
             </a:extLst>
           </p:cNvPr>
@@ -3262,7 +3257,7 @@
           <p:cNvPr id="20" name="">
             <a:extLst xmlns:a="http://schemas.openxmlformats.org/drawingml/2006/main">
               <a:ext uri="{FF2B5EF4-FFF2-40B4-BE49-F238E27FC236}">
-                <a16:creationId xmlns:a16="http://schemas.microsoft.com/office/drawing/2014/main" id="{826DEFFF-EEAF-42FF-A09A-E0FF98C54A41}"/>
+                <a16:creationId xmlns:a16="http://schemas.microsoft.com/office/drawing/2014/main" id="{01420CE0-3F82-463B-85C9-90A2598119A1}"/>
               </a:ext>
             </a:extLst>
           </p:cNvPr>
@@ -3310,7 +3305,7 @@
     </p:spTree>
     <p:extLst>
       <p:ext uri="{BB962C8B-B14F-4D97-AF65-F5344CB8AC3E}">
-        <p14:creationId xmlns:p14="http://schemas.microsoft.com/office/powerpoint/2010/main" val="947331160"/>
+        <p14:creationId xmlns:p14="http://schemas.microsoft.com/office/powerpoint/2010/main" val="619412190"/>
       </p:ext>
     </p:extLst>
   </p:cSld>
@@ -3341,7 +3336,7 @@
           <p:cNvPr id="35" name="">
             <a:extLst xmlns:a="http://schemas.openxmlformats.org/drawingml/2006/main">
               <a:ext uri="{FF2B5EF4-FFF2-40B4-BE49-F238E27FC236}">
-                <a16:creationId xmlns:a16="http://schemas.microsoft.com/office/drawing/2014/main" id="{24812165-C0BB-414B-8D9E-DE0457A0DC88}"/>
+                <a16:creationId xmlns:a16="http://schemas.microsoft.com/office/drawing/2014/main" id="{F03ABDB9-3C5C-48F8-914E-EFAF961CF3BE}"/>
               </a:ext>
             </a:extLst>
           </p:cNvPr>
@@ -3372,7 +3367,7 @@
           <p:cNvPr id="2" name="">
             <a:extLst xmlns:a="http://schemas.openxmlformats.org/drawingml/2006/main">
               <a:ext uri="{FF2B5EF4-FFF2-40B4-BE49-F238E27FC236}">
-                <a16:creationId xmlns:a16="http://schemas.microsoft.com/office/drawing/2014/main" id="{D4F178FC-A8BC-44D0-95C8-833683BFB71D}"/>
+                <a16:creationId xmlns:a16="http://schemas.microsoft.com/office/drawing/2014/main" id="{C08F2E86-7D85-403E-8FB0-23557823AF09}"/>
               </a:ext>
             </a:extLst>
           </p:cNvPr>
@@ -3422,7 +3417,7 @@
           <p:cNvPr id="3" name="">
             <a:extLst xmlns:a="http://schemas.openxmlformats.org/drawingml/2006/main">
               <a:ext uri="{FF2B5EF4-FFF2-40B4-BE49-F238E27FC236}">
-                <a16:creationId xmlns:a16="http://schemas.microsoft.com/office/drawing/2014/main" id="{66524667-D00E-4E22-BAFB-FE86DEA8635A}"/>
+                <a16:creationId xmlns:a16="http://schemas.microsoft.com/office/drawing/2014/main" id="{7BB163C0-74B2-4517-8D7A-72A99E55D55E}"/>
               </a:ext>
             </a:extLst>
           </p:cNvPr>
@@ -3472,7 +3467,7 @@
           <p:cNvPr id="4" name="">
             <a:extLst xmlns:a="http://schemas.openxmlformats.org/drawingml/2006/main">
               <a:ext uri="{FF2B5EF4-FFF2-40B4-BE49-F238E27FC236}">
-                <a16:creationId xmlns:a16="http://schemas.microsoft.com/office/drawing/2014/main" id="{E3DA2DD3-59FD-4310-89D3-BB7C0C7FF799}"/>
+                <a16:creationId xmlns:a16="http://schemas.microsoft.com/office/drawing/2014/main" id="{03D2AA67-98BE-4D55-9202-C19E25E9EA0E}"/>
               </a:ext>
             </a:extLst>
           </p:cNvPr>
@@ -3503,7 +3498,7 @@
           <p:cNvPr id="5" name="">
             <a:extLst xmlns:a="http://schemas.openxmlformats.org/drawingml/2006/main">
               <a:ext uri="{FF2B5EF4-FFF2-40B4-BE49-F238E27FC236}">
-                <a16:creationId xmlns:a16="http://schemas.microsoft.com/office/drawing/2014/main" id="{53372E4B-5127-471D-A133-D4ED4180E70B}"/>
+                <a16:creationId xmlns:a16="http://schemas.microsoft.com/office/drawing/2014/main" id="{C06760A3-B4A8-4747-98DF-771730E5A8E2}"/>
               </a:ext>
             </a:extLst>
           </p:cNvPr>
@@ -3553,7 +3548,7 @@
           <p:cNvPr id="6" name="">
             <a:extLst xmlns:a="http://schemas.openxmlformats.org/drawingml/2006/main">
               <a:ext uri="{FF2B5EF4-FFF2-40B4-BE49-F238E27FC236}">
-                <a16:creationId xmlns:a16="http://schemas.microsoft.com/office/drawing/2014/main" id="{DD32B028-5B1A-45F0-B887-FAAF32B8F258}"/>
+                <a16:creationId xmlns:a16="http://schemas.microsoft.com/office/drawing/2014/main" id="{ED2FFC97-93B6-4AD4-8047-079AF656D2EF}"/>
               </a:ext>
             </a:extLst>
           </p:cNvPr>
@@ -3603,7 +3598,7 @@
           <p:cNvPr id="7" name="">
             <a:extLst xmlns:a="http://schemas.openxmlformats.org/drawingml/2006/main">
               <a:ext uri="{FF2B5EF4-FFF2-40B4-BE49-F238E27FC236}">
-                <a16:creationId xmlns:a16="http://schemas.microsoft.com/office/drawing/2014/main" id="{2975D596-9AA9-4203-A69E-8F8FAA81EEB6}"/>
+                <a16:creationId xmlns:a16="http://schemas.microsoft.com/office/drawing/2014/main" id="{274633B0-869F-4540-930C-45DD9DEFDE7C}"/>
               </a:ext>
             </a:extLst>
           </p:cNvPr>
@@ -3634,7 +3629,7 @@
           <p:cNvPr id="8" name="">
             <a:extLst xmlns:a="http://schemas.openxmlformats.org/drawingml/2006/main">
               <a:ext uri="{FF2B5EF4-FFF2-40B4-BE49-F238E27FC236}">
-                <a16:creationId xmlns:a16="http://schemas.microsoft.com/office/drawing/2014/main" id="{59525285-C946-44C5-95F2-E1C67F403086}"/>
+                <a16:creationId xmlns:a16="http://schemas.microsoft.com/office/drawing/2014/main" id="{7004CE36-BCC2-4CD3-81DC-7F99AFA3A831}"/>
               </a:ext>
             </a:extLst>
           </p:cNvPr>
@@ -3665,7 +3660,7 @@
           <p:cNvPr id="9" name="">
             <a:extLst xmlns:a="http://schemas.openxmlformats.org/drawingml/2006/main">
               <a:ext uri="{FF2B5EF4-FFF2-40B4-BE49-F238E27FC236}">
-                <a16:creationId xmlns:a16="http://schemas.microsoft.com/office/drawing/2014/main" id="{E0F479FB-3281-40A6-A693-C6C60B73A6BC}"/>
+                <a16:creationId xmlns:a16="http://schemas.microsoft.com/office/drawing/2014/main" id="{2BD77333-D89C-4F10-9827-BCF9F0A1A2FB}"/>
               </a:ext>
             </a:extLst>
           </p:cNvPr>
@@ -3696,7 +3691,7 @@
           <p:cNvPr id="10" name="">
             <a:extLst xmlns:a="http://schemas.openxmlformats.org/drawingml/2006/main">
               <a:ext uri="{FF2B5EF4-FFF2-40B4-BE49-F238E27FC236}">
-                <a16:creationId xmlns:a16="http://schemas.microsoft.com/office/drawing/2014/main" id="{FA15C89D-F45F-479F-A325-4B8D1AFE7A62}"/>
+                <a16:creationId xmlns:a16="http://schemas.microsoft.com/office/drawing/2014/main" id="{9D5A8904-3675-4B32-9D89-6C8F282F437C}"/>
               </a:ext>
             </a:extLst>
           </p:cNvPr>
@@ -3727,7 +3722,7 @@
           <p:cNvPr id="11" name="">
             <a:extLst xmlns:a="http://schemas.openxmlformats.org/drawingml/2006/main">
               <a:ext uri="{FF2B5EF4-FFF2-40B4-BE49-F238E27FC236}">
-                <a16:creationId xmlns:a16="http://schemas.microsoft.com/office/drawing/2014/main" id="{DCD2CC48-D44E-4B30-B3E3-4D11D9C4E8B9}"/>
+                <a16:creationId xmlns:a16="http://schemas.microsoft.com/office/drawing/2014/main" id="{A96C5997-F292-4F1F-A9A2-C16FD4442CD9}"/>
               </a:ext>
             </a:extLst>
           </p:cNvPr>
@@ -3777,7 +3772,7 @@
           <p:cNvPr id="12" name="">
             <a:extLst xmlns:a="http://schemas.openxmlformats.org/drawingml/2006/main">
               <a:ext uri="{FF2B5EF4-FFF2-40B4-BE49-F238E27FC236}">
-                <a16:creationId xmlns:a16="http://schemas.microsoft.com/office/drawing/2014/main" id="{85787DC9-27BA-4F46-B3D3-457B9CBD4F74}"/>
+                <a16:creationId xmlns:a16="http://schemas.microsoft.com/office/drawing/2014/main" id="{777DC01C-BC6E-4922-BFCD-FBAC42813FDC}"/>
               </a:ext>
             </a:extLst>
           </p:cNvPr>
@@ -3808,7 +3803,7 @@
           <p:cNvPr id="13" name="">
             <a:extLst xmlns:a="http://schemas.openxmlformats.org/drawingml/2006/main">
               <a:ext uri="{FF2B5EF4-FFF2-40B4-BE49-F238E27FC236}">
-                <a16:creationId xmlns:a16="http://schemas.microsoft.com/office/drawing/2014/main" id="{EDB7C63B-EBEB-414D-97DA-21479FC7EADE}"/>
+                <a16:creationId xmlns:a16="http://schemas.microsoft.com/office/drawing/2014/main" id="{B9E6C9D7-39B5-4CDA-B760-1984FD6C9ED4}"/>
               </a:ext>
             </a:extLst>
           </p:cNvPr>
@@ -3858,7 +3853,7 @@
           <p:cNvPr id="14" name="">
             <a:extLst xmlns:a="http://schemas.openxmlformats.org/drawingml/2006/main">
               <a:ext uri="{FF2B5EF4-FFF2-40B4-BE49-F238E27FC236}">
-                <a16:creationId xmlns:a16="http://schemas.microsoft.com/office/drawing/2014/main" id="{68C0A035-C492-4812-BA5E-0C5A82A5DAAA}"/>
+                <a16:creationId xmlns:a16="http://schemas.microsoft.com/office/drawing/2014/main" id="{94AF1D0F-76DD-43D3-A97A-1D114B15440B}"/>
               </a:ext>
             </a:extLst>
           </p:cNvPr>
@@ -3908,7 +3903,7 @@
           <p:cNvPr id="15" name="">
             <a:extLst xmlns:a="http://schemas.openxmlformats.org/drawingml/2006/main">
               <a:ext uri="{FF2B5EF4-FFF2-40B4-BE49-F238E27FC236}">
-                <a16:creationId xmlns:a16="http://schemas.microsoft.com/office/drawing/2014/main" id="{B78A1D50-C48C-4844-AEC1-3601A9B745F4}"/>
+                <a16:creationId xmlns:a16="http://schemas.microsoft.com/office/drawing/2014/main" id="{0AA020E1-AF94-4AA7-AC1C-80CD5ED3D2B3}"/>
               </a:ext>
             </a:extLst>
           </p:cNvPr>
@@ -3958,7 +3953,7 @@
           <p:cNvPr id="16" name="">
             <a:extLst xmlns:a="http://schemas.openxmlformats.org/drawingml/2006/main">
               <a:ext uri="{FF2B5EF4-FFF2-40B4-BE49-F238E27FC236}">
-                <a16:creationId xmlns:a16="http://schemas.microsoft.com/office/drawing/2014/main" id="{B5E21011-3CD7-4938-A0C9-6FF1A07083A0}"/>
+                <a16:creationId xmlns:a16="http://schemas.microsoft.com/office/drawing/2014/main" id="{218B661F-96C5-4936-B835-37DE34654B6F}"/>
               </a:ext>
             </a:extLst>
           </p:cNvPr>
@@ -3989,7 +3984,7 @@
           <p:cNvPr id="17" name="">
             <a:extLst xmlns:a="http://schemas.openxmlformats.org/drawingml/2006/main">
               <a:ext uri="{FF2B5EF4-FFF2-40B4-BE49-F238E27FC236}">
-                <a16:creationId xmlns:a16="http://schemas.microsoft.com/office/drawing/2014/main" id="{924DD27E-0B05-47C7-B813-822EEB5A2F81}"/>
+                <a16:creationId xmlns:a16="http://schemas.microsoft.com/office/drawing/2014/main" id="{295614F9-ABEB-4A88-AC6C-EF6AB8EECA32}"/>
               </a:ext>
             </a:extLst>
           </p:cNvPr>
@@ -4039,7 +4034,7 @@
           <p:cNvPr id="18" name="">
             <a:extLst xmlns:a="http://schemas.openxmlformats.org/drawingml/2006/main">
               <a:ext uri="{FF2B5EF4-FFF2-40B4-BE49-F238E27FC236}">
-                <a16:creationId xmlns:a16="http://schemas.microsoft.com/office/drawing/2014/main" id="{0F42F92F-8D26-4B56-925F-F9BD0BF35B10}"/>
+                <a16:creationId xmlns:a16="http://schemas.microsoft.com/office/drawing/2014/main" id="{D2310EF3-0679-405A-A83B-CC33D993DD6E}"/>
               </a:ext>
             </a:extLst>
           </p:cNvPr>
@@ -4089,7 +4084,7 @@
           <p:cNvPr id="19" name="">
             <a:extLst xmlns:a="http://schemas.openxmlformats.org/drawingml/2006/main">
               <a:ext uri="{FF2B5EF4-FFF2-40B4-BE49-F238E27FC236}">
-                <a16:creationId xmlns:a16="http://schemas.microsoft.com/office/drawing/2014/main" id="{1D43F9A1-0270-47AC-8DAE-5F99E38AD913}"/>
+                <a16:creationId xmlns:a16="http://schemas.microsoft.com/office/drawing/2014/main" id="{9005FCAA-B0AC-4535-9178-71952331283A}"/>
               </a:ext>
             </a:extLst>
           </p:cNvPr>
@@ -4139,7 +4134,7 @@
           <p:cNvPr id="20" name="">
             <a:extLst xmlns:a="http://schemas.openxmlformats.org/drawingml/2006/main">
               <a:ext uri="{FF2B5EF4-FFF2-40B4-BE49-F238E27FC236}">
-                <a16:creationId xmlns:a16="http://schemas.microsoft.com/office/drawing/2014/main" id="{5A94660E-FF13-4B62-950F-0FEDBF7B4E5F}"/>
+                <a16:creationId xmlns:a16="http://schemas.microsoft.com/office/drawing/2014/main" id="{DEDEFCDE-23C2-4762-8949-156F48BA4166}"/>
               </a:ext>
             </a:extLst>
           </p:cNvPr>
@@ -4170,7 +4165,7 @@
           <p:cNvPr id="21" name="">
             <a:extLst xmlns:a="http://schemas.openxmlformats.org/drawingml/2006/main">
               <a:ext uri="{FF2B5EF4-FFF2-40B4-BE49-F238E27FC236}">
-                <a16:creationId xmlns:a16="http://schemas.microsoft.com/office/drawing/2014/main" id="{709BFB62-9D84-4B8A-B9B7-EE9C937B308D}"/>
+                <a16:creationId xmlns:a16="http://schemas.microsoft.com/office/drawing/2014/main" id="{5993BA99-50C5-401D-A2F0-8D0DCC94B5C8}"/>
               </a:ext>
             </a:extLst>
           </p:cNvPr>
@@ -4220,7 +4215,7 @@
           <p:cNvPr id="22" name="">
             <a:extLst xmlns:a="http://schemas.openxmlformats.org/drawingml/2006/main">
               <a:ext uri="{FF2B5EF4-FFF2-40B4-BE49-F238E27FC236}">
-                <a16:creationId xmlns:a16="http://schemas.microsoft.com/office/drawing/2014/main" id="{98F17690-FCE8-4F42-B7CE-65B1D092A8C5}"/>
+                <a16:creationId xmlns:a16="http://schemas.microsoft.com/office/drawing/2014/main" id="{5DAF1F8D-151A-4BF1-809B-6E6F836333C1}"/>
               </a:ext>
             </a:extLst>
           </p:cNvPr>
@@ -4270,7 +4265,7 @@
           <p:cNvPr id="23" name="">
             <a:extLst xmlns:a="http://schemas.openxmlformats.org/drawingml/2006/main">
               <a:ext uri="{FF2B5EF4-FFF2-40B4-BE49-F238E27FC236}">
-                <a16:creationId xmlns:a16="http://schemas.microsoft.com/office/drawing/2014/main" id="{E89F399F-3A0D-47DA-8EF5-12F9451A5C95}"/>
+                <a16:creationId xmlns:a16="http://schemas.microsoft.com/office/drawing/2014/main" id="{214EBF8D-AC53-41EC-A3E7-9BBF7D61CE1A}"/>
               </a:ext>
             </a:extLst>
           </p:cNvPr>
@@ -4320,7 +4315,7 @@
           <p:cNvPr id="24" name="">
             <a:extLst xmlns:a="http://schemas.openxmlformats.org/drawingml/2006/main">
               <a:ext uri="{FF2B5EF4-FFF2-40B4-BE49-F238E27FC236}">
-                <a16:creationId xmlns:a16="http://schemas.microsoft.com/office/drawing/2014/main" id="{CB2112F9-6FE7-4916-B821-96236681A3F1}"/>
+                <a16:creationId xmlns:a16="http://schemas.microsoft.com/office/drawing/2014/main" id="{34AD843E-2134-4200-8A0D-0406343D4B2F}"/>
               </a:ext>
             </a:extLst>
           </p:cNvPr>
@@ -4351,7 +4346,7 @@
           <p:cNvPr id="25" name="">
             <a:extLst xmlns:a="http://schemas.openxmlformats.org/drawingml/2006/main">
               <a:ext uri="{FF2B5EF4-FFF2-40B4-BE49-F238E27FC236}">
-                <a16:creationId xmlns:a16="http://schemas.microsoft.com/office/drawing/2014/main" id="{FAC9691B-0EDF-4525-BA50-1903E88DB198}"/>
+                <a16:creationId xmlns:a16="http://schemas.microsoft.com/office/drawing/2014/main" id="{32342833-1FE7-40E0-A8F6-511231BE434E}"/>
               </a:ext>
             </a:extLst>
           </p:cNvPr>
@@ -4401,7 +4396,7 @@
           <p:cNvPr id="26" name="">
             <a:extLst xmlns:a="http://schemas.openxmlformats.org/drawingml/2006/main">
               <a:ext uri="{FF2B5EF4-FFF2-40B4-BE49-F238E27FC236}">
-                <a16:creationId xmlns:a16="http://schemas.microsoft.com/office/drawing/2014/main" id="{67D3B0BD-F01B-4260-BA25-510A40156194}"/>
+                <a16:creationId xmlns:a16="http://schemas.microsoft.com/office/drawing/2014/main" id="{FD5A2286-7BD3-4A73-B9D0-0A62FBFFE2EF}"/>
               </a:ext>
             </a:extLst>
           </p:cNvPr>
@@ -4451,7 +4446,7 @@
           <p:cNvPr id="27" name="">
             <a:extLst xmlns:a="http://schemas.openxmlformats.org/drawingml/2006/main">
               <a:ext uri="{FF2B5EF4-FFF2-40B4-BE49-F238E27FC236}">
-                <a16:creationId xmlns:a16="http://schemas.microsoft.com/office/drawing/2014/main" id="{D404C85B-A85B-473A-B498-83C0C6BC8FB7}"/>
+                <a16:creationId xmlns:a16="http://schemas.microsoft.com/office/drawing/2014/main" id="{70979B49-36A9-4E7C-858D-22286870C4FA}"/>
               </a:ext>
             </a:extLst>
           </p:cNvPr>
@@ -4501,7 +4496,7 @@
           <p:cNvPr id="28" name="">
             <a:extLst xmlns:a="http://schemas.openxmlformats.org/drawingml/2006/main">
               <a:ext uri="{FF2B5EF4-FFF2-40B4-BE49-F238E27FC236}">
-                <a16:creationId xmlns:a16="http://schemas.microsoft.com/office/drawing/2014/main" id="{C39C8901-7789-4C1C-9262-428B910D629A}"/>
+                <a16:creationId xmlns:a16="http://schemas.microsoft.com/office/drawing/2014/main" id="{7E2B4CE6-F82F-493A-A6D6-E76675215684}"/>
               </a:ext>
             </a:extLst>
           </p:cNvPr>
@@ -4532,7 +4527,7 @@
           <p:cNvPr id="29" name="">
             <a:extLst xmlns:a="http://schemas.openxmlformats.org/drawingml/2006/main">
               <a:ext uri="{FF2B5EF4-FFF2-40B4-BE49-F238E27FC236}">
-                <a16:creationId xmlns:a16="http://schemas.microsoft.com/office/drawing/2014/main" id="{0D23EAEC-1F34-4E75-BAB6-668A5135B8D7}"/>
+                <a16:creationId xmlns:a16="http://schemas.microsoft.com/office/drawing/2014/main" id="{FC509ACB-E6CD-4E92-B43F-5C14FEFB1D27}"/>
               </a:ext>
             </a:extLst>
           </p:cNvPr>
@@ -4582,7 +4577,7 @@
           <p:cNvPr id="30" name="">
             <a:extLst xmlns:a="http://schemas.openxmlformats.org/drawingml/2006/main">
               <a:ext uri="{FF2B5EF4-FFF2-40B4-BE49-F238E27FC236}">
-                <a16:creationId xmlns:a16="http://schemas.microsoft.com/office/drawing/2014/main" id="{EFEEF2EC-2FF4-4438-BEC2-4B3B2B00F182}"/>
+                <a16:creationId xmlns:a16="http://schemas.microsoft.com/office/drawing/2014/main" id="{ADB101BE-719D-4E4B-8CD6-AD8B7AEF6708}"/>
               </a:ext>
             </a:extLst>
           </p:cNvPr>
@@ -4632,7 +4627,7 @@
           <p:cNvPr id="31" name="">
             <a:extLst xmlns:a="http://schemas.openxmlformats.org/drawingml/2006/main">
               <a:ext uri="{FF2B5EF4-FFF2-40B4-BE49-F238E27FC236}">
-                <a16:creationId xmlns:a16="http://schemas.microsoft.com/office/drawing/2014/main" id="{67C37244-E219-4D04-B1F4-D5D07DAE0F82}"/>
+                <a16:creationId xmlns:a16="http://schemas.microsoft.com/office/drawing/2014/main" id="{7C9ACC57-93A7-4D16-B59B-9440817356C1}"/>
               </a:ext>
             </a:extLst>
           </p:cNvPr>
@@ -4667,7 +4662,7 @@
           <p:cNvPr id="32" name="">
             <a:extLst xmlns:a="http://schemas.openxmlformats.org/drawingml/2006/main">
               <a:ext uri="{FF2B5EF4-FFF2-40B4-BE49-F238E27FC236}">
-                <a16:creationId xmlns:a16="http://schemas.microsoft.com/office/drawing/2014/main" id="{86B53CA4-4A90-46AD-9159-1238B4542BEA}"/>
+                <a16:creationId xmlns:a16="http://schemas.microsoft.com/office/drawing/2014/main" id="{05C6737F-02FF-40CC-93A5-A32A034FB665}"/>
               </a:ext>
             </a:extLst>
           </p:cNvPr>
@@ -4717,7 +4712,7 @@
           <p:cNvPr id="33" name="">
             <a:extLst xmlns:a="http://schemas.openxmlformats.org/drawingml/2006/main">
               <a:ext uri="{FF2B5EF4-FFF2-40B4-BE49-F238E27FC236}">
-                <a16:creationId xmlns:a16="http://schemas.microsoft.com/office/drawing/2014/main" id="{32CCC311-65D3-4B24-A40A-459A46BF173C}"/>
+                <a16:creationId xmlns:a16="http://schemas.microsoft.com/office/drawing/2014/main" id="{AAA27B74-FB7A-4B1C-830E-75E3D1992E18}"/>
               </a:ext>
             </a:extLst>
           </p:cNvPr>
@@ -4767,7 +4762,7 @@
           <p:cNvPr id="34" name="">
             <a:extLst xmlns:a="http://schemas.openxmlformats.org/drawingml/2006/main">
               <a:ext uri="{FF2B5EF4-FFF2-40B4-BE49-F238E27FC236}">
-                <a16:creationId xmlns:a16="http://schemas.microsoft.com/office/drawing/2014/main" id="{5C60B05D-2622-4E65-A8DA-D31A62FAE177}"/>
+                <a16:creationId xmlns:a16="http://schemas.microsoft.com/office/drawing/2014/main" id="{0D57B10A-4639-4A72-9B4C-5C11CEBE2EB1}"/>
               </a:ext>
             </a:extLst>
           </p:cNvPr>
@@ -4819,7 +4814,7 @@
     </p:spTree>
     <p:extLst>
       <p:ext uri="{BB962C8B-B14F-4D97-AF65-F5344CB8AC3E}">
-        <p14:creationId xmlns:p14="http://schemas.microsoft.com/office/powerpoint/2010/main" val="824007861"/>
+        <p14:creationId xmlns:p14="http://schemas.microsoft.com/office/powerpoint/2010/main" val="447386516"/>
       </p:ext>
     </p:extLst>
   </p:cSld>
@@ -4850,7 +4845,7 @@
           <p:cNvPr id="26" name="">
             <a:extLst xmlns:a="http://schemas.openxmlformats.org/drawingml/2006/main">
               <a:ext uri="{FF2B5EF4-FFF2-40B4-BE49-F238E27FC236}">
-                <a16:creationId xmlns:a16="http://schemas.microsoft.com/office/drawing/2014/main" id="{3C0FF9AD-34A7-4D08-A45F-A5BE9608CC5E}"/>
+                <a16:creationId xmlns:a16="http://schemas.microsoft.com/office/drawing/2014/main" id="{5C2B529C-3745-4A5E-8631-19B28AC854BB}"/>
               </a:ext>
             </a:extLst>
           </p:cNvPr>
@@ -4881,7 +4876,7 @@
           <p:cNvPr id="2" name="">
             <a:extLst xmlns:a="http://schemas.openxmlformats.org/drawingml/2006/main">
               <a:ext uri="{FF2B5EF4-FFF2-40B4-BE49-F238E27FC236}">
-                <a16:creationId xmlns:a16="http://schemas.microsoft.com/office/drawing/2014/main" id="{4EF98992-3DF8-459B-B482-D2B0B0A2AEF9}"/>
+                <a16:creationId xmlns:a16="http://schemas.microsoft.com/office/drawing/2014/main" id="{01DDC123-8326-4DC7-AC93-C042412C83F7}"/>
               </a:ext>
             </a:extLst>
           </p:cNvPr>
@@ -4921,7 +4916,7 @@
                   <a:srgbClr val="0F766E"/>
                 </a:solidFill>
               </a:rPr>
-              <a:t>BOUNDED AGENT LOOP</a:t>
+              <a:t>BOUNDED AGENT LOOP · CACHED REHEARSAL</a:t>
             </a:r>
           </a:p>
         </p:txBody>
@@ -4931,7 +4926,7 @@
           <p:cNvPr id="3" name="">
             <a:extLst xmlns:a="http://schemas.openxmlformats.org/drawingml/2006/main">
               <a:ext uri="{FF2B5EF4-FFF2-40B4-BE49-F238E27FC236}">
-                <a16:creationId xmlns:a16="http://schemas.microsoft.com/office/drawing/2014/main" id="{8DCBE73D-0AA5-48CF-9092-6BCC52EA31DD}"/>
+                <a16:creationId xmlns:a16="http://schemas.microsoft.com/office/drawing/2014/main" id="{15CD897A-8CEE-43A5-A15C-82F0AB7BCA19}"/>
               </a:ext>
             </a:extLst>
           </p:cNvPr>
@@ -4981,7 +4976,7 @@
           <p:cNvPr id="4" name="">
             <a:extLst xmlns:a="http://schemas.openxmlformats.org/drawingml/2006/main">
               <a:ext uri="{FF2B5EF4-FFF2-40B4-BE49-F238E27FC236}">
-                <a16:creationId xmlns:a16="http://schemas.microsoft.com/office/drawing/2014/main" id="{58E45A49-598C-40B6-B7B5-7C0AFEB5E62D}"/>
+                <a16:creationId xmlns:a16="http://schemas.microsoft.com/office/drawing/2014/main" id="{DB8E0A9B-6F2F-4325-BC48-D2DCBABE4748}"/>
               </a:ext>
             </a:extLst>
           </p:cNvPr>
@@ -5012,7 +5007,7 @@
           <p:cNvPr id="5" name="">
             <a:extLst xmlns:a="http://schemas.openxmlformats.org/drawingml/2006/main">
               <a:ext uri="{FF2B5EF4-FFF2-40B4-BE49-F238E27FC236}">
-                <a16:creationId xmlns:a16="http://schemas.microsoft.com/office/drawing/2014/main" id="{1857DF46-8DB0-4F38-B905-577DA162A7A9}"/>
+                <a16:creationId xmlns:a16="http://schemas.microsoft.com/office/drawing/2014/main" id="{FE751AB5-A163-497E-8D40-788BAC86035D}"/>
               </a:ext>
             </a:extLst>
           </p:cNvPr>
@@ -5062,7 +5057,7 @@
           <p:cNvPr id="6" name="">
             <a:extLst xmlns:a="http://schemas.openxmlformats.org/drawingml/2006/main">
               <a:ext uri="{FF2B5EF4-FFF2-40B4-BE49-F238E27FC236}">
-                <a16:creationId xmlns:a16="http://schemas.microsoft.com/office/drawing/2014/main" id="{67AD6EC5-C7B0-4EA9-A14E-FDB084CD0CC2}"/>
+                <a16:creationId xmlns:a16="http://schemas.microsoft.com/office/drawing/2014/main" id="{67B71C04-27DD-4D22-AEBF-10A9625CAE48}"/>
               </a:ext>
             </a:extLst>
           </p:cNvPr>
@@ -5102,7 +5097,7 @@
                   <a:srgbClr val="102A43"/>
                 </a:solidFill>
               </a:rPr>
-              <a:t>One targeted cycle closes coverage — or stops</a:t>
+              <a:t>Coverage satisfied on the first bounded pass</a:t>
             </a:r>
           </a:p>
         </p:txBody>
@@ -5112,7 +5107,7 @@
           <p:cNvPr id="7" name="">
             <a:extLst xmlns:a="http://schemas.openxmlformats.org/drawingml/2006/main">
               <a:ext uri="{FF2B5EF4-FFF2-40B4-BE49-F238E27FC236}">
-                <a16:creationId xmlns:a16="http://schemas.microsoft.com/office/drawing/2014/main" id="{4766469B-A5F0-4B64-A178-A18CE317DC60}"/>
+                <a16:creationId xmlns:a16="http://schemas.microsoft.com/office/drawing/2014/main" id="{132EB52E-A8E1-4BEA-8D28-CFAFE6DB7207}"/>
               </a:ext>
             </a:extLst>
           </p:cNvPr>
@@ -5143,7 +5138,7 @@
           <p:cNvPr id="8" name="">
             <a:extLst xmlns:a="http://schemas.openxmlformats.org/drawingml/2006/main">
               <a:ext uri="{FF2B5EF4-FFF2-40B4-BE49-F238E27FC236}">
-                <a16:creationId xmlns:a16="http://schemas.microsoft.com/office/drawing/2014/main" id="{D8310F1D-6ED4-43F1-93D0-52FD02755321}"/>
+                <a16:creationId xmlns:a16="http://schemas.microsoft.com/office/drawing/2014/main" id="{810ECCBA-E508-4AC4-9951-D9EECC437DD5}"/>
               </a:ext>
             </a:extLst>
           </p:cNvPr>
@@ -5197,7 +5192,7 @@
           <p:cNvPr id="9" name="">
             <a:extLst xmlns:a="http://schemas.openxmlformats.org/drawingml/2006/main">
               <a:ext uri="{FF2B5EF4-FFF2-40B4-BE49-F238E27FC236}">
-                <a16:creationId xmlns:a16="http://schemas.microsoft.com/office/drawing/2014/main" id="{588A7C09-8621-4124-8474-A8B83E9F9AAC}"/>
+                <a16:creationId xmlns:a16="http://schemas.microsoft.com/office/drawing/2014/main" id="{6B16FA6D-FA7C-4BB7-8D50-F18D01C018D8}"/>
               </a:ext>
             </a:extLst>
           </p:cNvPr>
@@ -5247,7 +5242,7 @@
           <p:cNvPr id="10" name="">
             <a:extLst xmlns:a="http://schemas.openxmlformats.org/drawingml/2006/main">
               <a:ext uri="{FF2B5EF4-FFF2-40B4-BE49-F238E27FC236}">
-                <a16:creationId xmlns:a16="http://schemas.microsoft.com/office/drawing/2014/main" id="{03C1D3BE-D69E-4F08-BBD3-97644FC58685}"/>
+                <a16:creationId xmlns:a16="http://schemas.microsoft.com/office/drawing/2014/main" id="{19BA494B-182F-4A18-84C6-3FF30E099051}"/>
               </a:ext>
             </a:extLst>
           </p:cNvPr>
@@ -5297,7 +5292,7 @@
           <p:cNvPr id="11" name="">
             <a:extLst xmlns:a="http://schemas.openxmlformats.org/drawingml/2006/main">
               <a:ext uri="{FF2B5EF4-FFF2-40B4-BE49-F238E27FC236}">
-                <a16:creationId xmlns:a16="http://schemas.microsoft.com/office/drawing/2014/main" id="{FE4B311A-84A5-441A-842D-7B78F153A256}"/>
+                <a16:creationId xmlns:a16="http://schemas.microsoft.com/office/drawing/2014/main" id="{82D51392-47F8-4DAB-A02E-023B62723E68}"/>
               </a:ext>
             </a:extLst>
           </p:cNvPr>
@@ -5351,7 +5346,7 @@
           <p:cNvPr id="12" name="">
             <a:extLst xmlns:a="http://schemas.openxmlformats.org/drawingml/2006/main">
               <a:ext uri="{FF2B5EF4-FFF2-40B4-BE49-F238E27FC236}">
-                <a16:creationId xmlns:a16="http://schemas.microsoft.com/office/drawing/2014/main" id="{9E3FF41A-1D57-4168-8908-3A341BFB9D3D}"/>
+                <a16:creationId xmlns:a16="http://schemas.microsoft.com/office/drawing/2014/main" id="{95241CDB-341B-4E6B-B49D-367B9C352228}"/>
               </a:ext>
             </a:extLst>
           </p:cNvPr>
@@ -5401,7 +5396,7 @@
           <p:cNvPr id="13" name="">
             <a:extLst xmlns:a="http://schemas.openxmlformats.org/drawingml/2006/main">
               <a:ext uri="{FF2B5EF4-FFF2-40B4-BE49-F238E27FC236}">
-                <a16:creationId xmlns:a16="http://schemas.microsoft.com/office/drawing/2014/main" id="{2685BE7C-C1AD-46F2-9BE4-0B55B8A1E2D4}"/>
+                <a16:creationId xmlns:a16="http://schemas.microsoft.com/office/drawing/2014/main" id="{61FB8EC3-E075-42B1-8D83-48F1B762C25E}"/>
               </a:ext>
             </a:extLst>
           </p:cNvPr>
@@ -5451,7 +5446,7 @@
           <p:cNvPr id="14" name="">
             <a:extLst xmlns:a="http://schemas.openxmlformats.org/drawingml/2006/main">
               <a:ext uri="{FF2B5EF4-FFF2-40B4-BE49-F238E27FC236}">
-                <a16:creationId xmlns:a16="http://schemas.microsoft.com/office/drawing/2014/main" id="{E1904B8E-9150-426E-9437-C4FC8B60BDDB}"/>
+                <a16:creationId xmlns:a16="http://schemas.microsoft.com/office/drawing/2014/main" id="{ACB2E836-9556-4994-9894-2E51ABDEDBD1}"/>
               </a:ext>
             </a:extLst>
           </p:cNvPr>
@@ -5505,7 +5500,7 @@
           <p:cNvPr id="15" name="">
             <a:extLst xmlns:a="http://schemas.openxmlformats.org/drawingml/2006/main">
               <a:ext uri="{FF2B5EF4-FFF2-40B4-BE49-F238E27FC236}">
-                <a16:creationId xmlns:a16="http://schemas.microsoft.com/office/drawing/2014/main" id="{A4122BF7-3276-460E-AD27-93FD9918C7B0}"/>
+                <a16:creationId xmlns:a16="http://schemas.microsoft.com/office/drawing/2014/main" id="{8BCEF53C-9EE8-4C95-B22A-4C873E832905}"/>
               </a:ext>
             </a:extLst>
           </p:cNvPr>
@@ -5555,7 +5550,7 @@
           <p:cNvPr id="16" name="">
             <a:extLst xmlns:a="http://schemas.openxmlformats.org/drawingml/2006/main">
               <a:ext uri="{FF2B5EF4-FFF2-40B4-BE49-F238E27FC236}">
-                <a16:creationId xmlns:a16="http://schemas.microsoft.com/office/drawing/2014/main" id="{D2BA6DC3-EAAD-426F-9222-DA413DBAB2AA}"/>
+                <a16:creationId xmlns:a16="http://schemas.microsoft.com/office/drawing/2014/main" id="{3EC19B1A-184C-4AE5-9504-742BF40241FC}"/>
               </a:ext>
             </a:extLst>
           </p:cNvPr>
@@ -5605,7 +5600,7 @@
           <p:cNvPr id="17" name="">
             <a:extLst xmlns:a="http://schemas.openxmlformats.org/drawingml/2006/main">
               <a:ext uri="{FF2B5EF4-FFF2-40B4-BE49-F238E27FC236}">
-                <a16:creationId xmlns:a16="http://schemas.microsoft.com/office/drawing/2014/main" id="{ACAD27AB-D92D-4895-B151-609AB241B528}"/>
+                <a16:creationId xmlns:a16="http://schemas.microsoft.com/office/drawing/2014/main" id="{A492FA1D-A27C-4553-860F-59D311D7A045}"/>
               </a:ext>
             </a:extLst>
           </p:cNvPr>
@@ -5659,7 +5654,7 @@
           <p:cNvPr id="18" name="">
             <a:extLst xmlns:a="http://schemas.openxmlformats.org/drawingml/2006/main">
               <a:ext uri="{FF2B5EF4-FFF2-40B4-BE49-F238E27FC236}">
-                <a16:creationId xmlns:a16="http://schemas.microsoft.com/office/drawing/2014/main" id="{B88ADD6A-4061-4766-8ADC-AE5CE6DC6004}"/>
+                <a16:creationId xmlns:a16="http://schemas.microsoft.com/office/drawing/2014/main" id="{04EBC74B-7B44-4363-9AFA-EE43F29E0384}"/>
               </a:ext>
             </a:extLst>
           </p:cNvPr>
@@ -5699,7 +5694,7 @@
                   <a:srgbClr val="0F766E"/>
                 </a:solidFill>
               </a:rPr>
-              <a:t>ADAPT</a:t>
+              <a:t>FREEZE</a:t>
             </a:r>
           </a:p>
         </p:txBody>
@@ -5709,7 +5704,7 @@
           <p:cNvPr id="19" name="">
             <a:extLst xmlns:a="http://schemas.openxmlformats.org/drawingml/2006/main">
               <a:ext uri="{FF2B5EF4-FFF2-40B4-BE49-F238E27FC236}">
-                <a16:creationId xmlns:a16="http://schemas.microsoft.com/office/drawing/2014/main" id="{DD3DF7A7-4D85-422E-A7C4-DC5A2379FA63}"/>
+                <a16:creationId xmlns:a16="http://schemas.microsoft.com/office/drawing/2014/main" id="{F713CBCE-ECFC-44DE-9154-FEE8FAEE475D}"/>
               </a:ext>
             </a:extLst>
           </p:cNvPr>
@@ -5749,7 +5744,7 @@
                   <a:srgbClr val="627D8C"/>
                 </a:solidFill>
               </a:rPr>
-              <a:t>One targeted batch</a:t>
+              <a:t>No adaptive call needed</a:t>
             </a:r>
           </a:p>
         </p:txBody>
@@ -5759,7 +5754,7 @@
           <p:cNvPr id="20" name="">
             <a:extLst xmlns:a="http://schemas.openxmlformats.org/drawingml/2006/main">
               <a:ext uri="{FF2B5EF4-FFF2-40B4-BE49-F238E27FC236}">
-                <a16:creationId xmlns:a16="http://schemas.microsoft.com/office/drawing/2014/main" id="{C7A02D96-B259-47FD-AC43-88D61E61D0B5}"/>
+                <a16:creationId xmlns:a16="http://schemas.microsoft.com/office/drawing/2014/main" id="{A581CF8E-D54F-47E1-9A82-C768DB2AB4E8}"/>
               </a:ext>
             </a:extLst>
           </p:cNvPr>
@@ -5813,7 +5808,7 @@
           <p:cNvPr id="21" name="">
             <a:extLst xmlns:a="http://schemas.openxmlformats.org/drawingml/2006/main">
               <a:ext uri="{FF2B5EF4-FFF2-40B4-BE49-F238E27FC236}">
-                <a16:creationId xmlns:a16="http://schemas.microsoft.com/office/drawing/2014/main" id="{F48834DD-7B8D-4DE6-9F0A-4A4C5470548B}"/>
+                <a16:creationId xmlns:a16="http://schemas.microsoft.com/office/drawing/2014/main" id="{66D2DD5D-6E87-4895-A33D-A366C1911996}"/>
               </a:ext>
             </a:extLst>
           </p:cNvPr>
@@ -5863,7 +5858,7 @@
           <p:cNvPr id="22" name="">
             <a:extLst xmlns:a="http://schemas.openxmlformats.org/drawingml/2006/main">
               <a:ext uri="{FF2B5EF4-FFF2-40B4-BE49-F238E27FC236}">
-                <a16:creationId xmlns:a16="http://schemas.microsoft.com/office/drawing/2014/main" id="{7C2ED0AF-6EC2-4127-9F27-AA457F42655D}"/>
+                <a16:creationId xmlns:a16="http://schemas.microsoft.com/office/drawing/2014/main" id="{3F0B7E0A-A6DB-43CA-904F-5C656B17198F}"/>
               </a:ext>
             </a:extLst>
           </p:cNvPr>
@@ -5913,7 +5908,7 @@
           <p:cNvPr id="23" name="">
             <a:extLst xmlns:a="http://schemas.openxmlformats.org/drawingml/2006/main">
               <a:ext uri="{FF2B5EF4-FFF2-40B4-BE49-F238E27FC236}">
-                <a16:creationId xmlns:a16="http://schemas.microsoft.com/office/drawing/2014/main" id="{84D60711-1AD8-491C-A180-07D7A19B7475}"/>
+                <a16:creationId xmlns:a16="http://schemas.microsoft.com/office/drawing/2014/main" id="{43311140-B7C9-4BB5-A230-F6A09FF0F032}"/>
               </a:ext>
             </a:extLst>
           </p:cNvPr>
@@ -5946,7 +5941,7 @@
           <p:cNvPr id="24" name="">
             <a:extLst xmlns:a="http://schemas.openxmlformats.org/drawingml/2006/main">
               <a:ext uri="{FF2B5EF4-FFF2-40B4-BE49-F238E27FC236}">
-                <a16:creationId xmlns:a16="http://schemas.microsoft.com/office/drawing/2014/main" id="{BC520C1C-4488-419B-A3FE-AF877701A4D0}"/>
+                <a16:creationId xmlns:a16="http://schemas.microsoft.com/office/drawing/2014/main" id="{D64D790D-2DC5-4D64-9FEA-830A53F5E077}"/>
               </a:ext>
             </a:extLst>
           </p:cNvPr>
@@ -5958,7 +5953,7 @@
         <p:spPr>
           <a:xfrm xmlns:a="http://schemas.openxmlformats.org/drawingml/2006/main">
             <a:off x="7353300" y="5191125"/>
-            <a:ext cx="704850" cy="228600"/>
+            <a:ext cx="952500" cy="228600"/>
           </a:xfrm>
           <a:prstGeom xmlns:a="http://schemas.openxmlformats.org/drawingml/2006/main" prst="rect">
             <a:avLst/>
@@ -5986,7 +5981,7 @@
                   <a:srgbClr val="B7791F"/>
                 </a:solidFill>
               </a:rPr>
-              <a:t>Bound</a:t>
+              <a:t>Observed</a:t>
             </a:r>
           </a:p>
         </p:txBody>
@@ -5996,19 +5991,19 @@
           <p:cNvPr id="25" name="">
             <a:extLst xmlns:a="http://schemas.openxmlformats.org/drawingml/2006/main">
               <a:ext uri="{FF2B5EF4-FFF2-40B4-BE49-F238E27FC236}">
-                <a16:creationId xmlns:a16="http://schemas.microsoft.com/office/drawing/2014/main" id="{A2BAB13F-B84B-465C-9BF1-19A84293481B}"/>
-              </a:ext>
-            </a:extLst>
-          </p:cNvPr>
-          <p:cNvSpPr>
-            <a:spLocks xmlns:a="http://schemas.openxmlformats.org/drawingml/2006/main" noGrp="1"/>
-          </p:cNvSpPr>
-          <p:nvPr/>
-        </p:nvSpPr>
-        <p:spPr>
-          <a:xfrm xmlns:a="http://schemas.openxmlformats.org/drawingml/2006/main">
-            <a:off x="8115300" y="5124450"/>
-            <a:ext cx="2705100" cy="419100"/>
+                <a16:creationId xmlns:a16="http://schemas.microsoft.com/office/drawing/2014/main" id="{D476802A-1CC0-4192-B70B-E19A30DB4674}"/>
+              </a:ext>
+            </a:extLst>
+          </p:cNvPr>
+          <p:cNvSpPr>
+            <a:spLocks xmlns:a="http://schemas.openxmlformats.org/drawingml/2006/main" noGrp="1"/>
+          </p:cNvSpPr>
+          <p:nvPr/>
+        </p:nvSpPr>
+        <p:spPr>
+          <a:xfrm xmlns:a="http://schemas.openxmlformats.org/drawingml/2006/main">
+            <a:off x="8420100" y="5124450"/>
+            <a:ext cx="2400300" cy="419100"/>
           </a:xfrm>
           <a:prstGeom xmlns:a="http://schemas.openxmlformats.org/drawingml/2006/main" prst="rect">
             <a:avLst/>
@@ -6036,7 +6031,7 @@
                   <a:srgbClr val="243B53"/>
                 </a:solidFill>
               </a:rPr>
-              <a:t>At most one targeted generation cycle before suite freeze.</a:t>
+              <a:t>0 targeted cycles · minimum coverage already satisfied.</a:t>
             </a:r>
           </a:p>
         </p:txBody>
@@ -6044,7 +6039,7 @@
     </p:spTree>
     <p:extLst>
       <p:ext uri="{BB962C8B-B14F-4D97-AF65-F5344CB8AC3E}">
-        <p14:creationId xmlns:p14="http://schemas.microsoft.com/office/powerpoint/2010/main" val="495855401"/>
+        <p14:creationId xmlns:p14="http://schemas.microsoft.com/office/powerpoint/2010/main" val="1630520510"/>
       </p:ext>
     </p:extLst>
   </p:cSld>
@@ -6075,7 +6070,7 @@
           <p:cNvPr id="22" name="">
             <a:extLst xmlns:a="http://schemas.openxmlformats.org/drawingml/2006/main">
               <a:ext uri="{FF2B5EF4-FFF2-40B4-BE49-F238E27FC236}">
-                <a16:creationId xmlns:a16="http://schemas.microsoft.com/office/drawing/2014/main" id="{5689E6C4-B500-4CB5-9936-411EC19E326F}"/>
+                <a16:creationId xmlns:a16="http://schemas.microsoft.com/office/drawing/2014/main" id="{EEF490EB-63AB-45E9-BED1-9873607A8517}"/>
               </a:ext>
             </a:extLst>
           </p:cNvPr>
@@ -6106,7 +6101,7 @@
           <p:cNvPr id="2" name="">
             <a:extLst xmlns:a="http://schemas.openxmlformats.org/drawingml/2006/main">
               <a:ext uri="{FF2B5EF4-FFF2-40B4-BE49-F238E27FC236}">
-                <a16:creationId xmlns:a16="http://schemas.microsoft.com/office/drawing/2014/main" id="{D61A7208-8DE7-49E4-8847-E800803A8980}"/>
+                <a16:creationId xmlns:a16="http://schemas.microsoft.com/office/drawing/2014/main" id="{8AFC4590-8A59-4280-B32A-73C6F50E4BB5}"/>
               </a:ext>
             </a:extLst>
           </p:cNvPr>
@@ -6146,7 +6141,7 @@
                   <a:srgbClr val="0F766E"/>
                 </a:solidFill>
               </a:rPr>
-              <a:t>TARGET ARCHITECTURE · INTEGRATION PENDING</a:t>
+              <a:t>CURRENT ARCHITECTURE · CACHED REHEARSAL</a:t>
             </a:r>
           </a:p>
         </p:txBody>
@@ -6156,7 +6151,7 @@
           <p:cNvPr id="3" name="">
             <a:extLst xmlns:a="http://schemas.openxmlformats.org/drawingml/2006/main">
               <a:ext uri="{FF2B5EF4-FFF2-40B4-BE49-F238E27FC236}">
-                <a16:creationId xmlns:a16="http://schemas.microsoft.com/office/drawing/2014/main" id="{4B645468-90FA-4760-9D9B-847BD37D14F9}"/>
+                <a16:creationId xmlns:a16="http://schemas.microsoft.com/office/drawing/2014/main" id="{48AA8D18-3098-48A3-A69D-92D65899C1EB}"/>
               </a:ext>
             </a:extLst>
           </p:cNvPr>
@@ -6206,7 +6201,7 @@
           <p:cNvPr id="4" name="">
             <a:extLst xmlns:a="http://schemas.openxmlformats.org/drawingml/2006/main">
               <a:ext uri="{FF2B5EF4-FFF2-40B4-BE49-F238E27FC236}">
-                <a16:creationId xmlns:a16="http://schemas.microsoft.com/office/drawing/2014/main" id="{445193D7-D0D5-4B73-963F-92367DD1662A}"/>
+                <a16:creationId xmlns:a16="http://schemas.microsoft.com/office/drawing/2014/main" id="{F405F0C5-B96F-4C28-9849-719B88456C5E}"/>
               </a:ext>
             </a:extLst>
           </p:cNvPr>
@@ -6237,7 +6232,7 @@
           <p:cNvPr id="5" name="">
             <a:extLst xmlns:a="http://schemas.openxmlformats.org/drawingml/2006/main">
               <a:ext uri="{FF2B5EF4-FFF2-40B4-BE49-F238E27FC236}">
-                <a16:creationId xmlns:a16="http://schemas.microsoft.com/office/drawing/2014/main" id="{B8B4C2E9-4158-4C75-A3CA-DD2FB89C6230}"/>
+                <a16:creationId xmlns:a16="http://schemas.microsoft.com/office/drawing/2014/main" id="{D5E1B8E4-D6E0-4931-B415-107D7C01D07A}"/>
               </a:ext>
             </a:extLst>
           </p:cNvPr>
@@ -6287,7 +6282,7 @@
           <p:cNvPr id="6" name="">
             <a:extLst xmlns:a="http://schemas.openxmlformats.org/drawingml/2006/main">
               <a:ext uri="{FF2B5EF4-FFF2-40B4-BE49-F238E27FC236}">
-                <a16:creationId xmlns:a16="http://schemas.microsoft.com/office/drawing/2014/main" id="{6450A096-DAB4-4E24-A627-B60325969A1A}"/>
+                <a16:creationId xmlns:a16="http://schemas.microsoft.com/office/drawing/2014/main" id="{FEADA267-6400-4CB3-BF4E-60A1924733C7}"/>
               </a:ext>
             </a:extLst>
           </p:cNvPr>
@@ -6337,7 +6332,7 @@
           <p:cNvPr id="7" name="">
             <a:extLst xmlns:a="http://schemas.openxmlformats.org/drawingml/2006/main">
               <a:ext uri="{FF2B5EF4-FFF2-40B4-BE49-F238E27FC236}">
-                <a16:creationId xmlns:a16="http://schemas.microsoft.com/office/drawing/2014/main" id="{270154D8-7052-474A-99D8-4B082A38A8D9}"/>
+                <a16:creationId xmlns:a16="http://schemas.microsoft.com/office/drawing/2014/main" id="{EC4581EF-E4AF-4C58-B01F-B5CAF2D075D9}"/>
               </a:ext>
             </a:extLst>
           </p:cNvPr>
@@ -6368,7 +6363,7 @@
           <p:cNvPr id="8" name="">
             <a:extLst xmlns:a="http://schemas.openxmlformats.org/drawingml/2006/main">
               <a:ext uri="{FF2B5EF4-FFF2-40B4-BE49-F238E27FC236}">
-                <a16:creationId xmlns:a16="http://schemas.microsoft.com/office/drawing/2014/main" id="{68717EB4-ACE4-479F-9438-2BBECD428194}"/>
+                <a16:creationId xmlns:a16="http://schemas.microsoft.com/office/drawing/2014/main" id="{07EDA7A6-901F-4667-A2C5-9162EE9186E9}"/>
               </a:ext>
             </a:extLst>
           </p:cNvPr>
@@ -6399,7 +6394,7 @@
           <p:cNvPr id="9" name="">
             <a:extLst xmlns:a="http://schemas.openxmlformats.org/drawingml/2006/main">
               <a:ext uri="{FF2B5EF4-FFF2-40B4-BE49-F238E27FC236}">
-                <a16:creationId xmlns:a16="http://schemas.microsoft.com/office/drawing/2014/main" id="{3710BB96-B9C5-4BAA-B925-973D550010C5}"/>
+                <a16:creationId xmlns:a16="http://schemas.microsoft.com/office/drawing/2014/main" id="{6E19FC36-3B30-492B-868C-BE80F0CA6696}"/>
               </a:ext>
             </a:extLst>
           </p:cNvPr>
@@ -6430,7 +6425,7 @@
           <p:cNvPr id="10" name="">
             <a:extLst xmlns:a="http://schemas.openxmlformats.org/drawingml/2006/main">
               <a:ext uri="{FF2B5EF4-FFF2-40B4-BE49-F238E27FC236}">
-                <a16:creationId xmlns:a16="http://schemas.microsoft.com/office/drawing/2014/main" id="{7D028691-C84D-4AA2-AD19-99950739D861}"/>
+                <a16:creationId xmlns:a16="http://schemas.microsoft.com/office/drawing/2014/main" id="{4316AB68-12A8-4CCB-9562-1199F80B23F8}"/>
               </a:ext>
             </a:extLst>
           </p:cNvPr>
@@ -6497,7 +6492,7 @@
           <p:cNvPr id="11" name="">
             <a:extLst xmlns:a="http://schemas.openxmlformats.org/drawingml/2006/main">
               <a:ext uri="{FF2B5EF4-FFF2-40B4-BE49-F238E27FC236}">
-                <a16:creationId xmlns:a16="http://schemas.microsoft.com/office/drawing/2014/main" id="{BB3F3600-71D3-4ED4-99C5-5688A3BBC5D5}"/>
+                <a16:creationId xmlns:a16="http://schemas.microsoft.com/office/drawing/2014/main" id="{A5AFB505-D2E4-449C-9829-025A71D6DC10}"/>
               </a:ext>
             </a:extLst>
           </p:cNvPr>
@@ -6532,7 +6527,7 @@
           <p:cNvPr id="12" name="">
             <a:extLst xmlns:a="http://schemas.openxmlformats.org/drawingml/2006/main">
               <a:ext uri="{FF2B5EF4-FFF2-40B4-BE49-F238E27FC236}">
-                <a16:creationId xmlns:a16="http://schemas.microsoft.com/office/drawing/2014/main" id="{F7C634E7-52E2-4B3F-8034-15DE243AAD0F}"/>
+                <a16:creationId xmlns:a16="http://schemas.microsoft.com/office/drawing/2014/main" id="{7E0686D6-8C22-4065-BB19-D84E844D3853}"/>
               </a:ext>
             </a:extLst>
           </p:cNvPr>
@@ -6582,7 +6577,7 @@
           <p:cNvPr id="13" name="">
             <a:extLst xmlns:a="http://schemas.openxmlformats.org/drawingml/2006/main">
               <a:ext uri="{FF2B5EF4-FFF2-40B4-BE49-F238E27FC236}">
-                <a16:creationId xmlns:a16="http://schemas.microsoft.com/office/drawing/2014/main" id="{8B0C5514-7C86-46C8-8070-2932E7902D61}"/>
+                <a16:creationId xmlns:a16="http://schemas.microsoft.com/office/drawing/2014/main" id="{53A6AC28-6C49-434E-84FB-AE3C2804AB78}"/>
               </a:ext>
             </a:extLst>
           </p:cNvPr>
@@ -6636,7 +6631,7 @@
           <p:cNvPr id="14" name="">
             <a:extLst xmlns:a="http://schemas.openxmlformats.org/drawingml/2006/main">
               <a:ext uri="{FF2B5EF4-FFF2-40B4-BE49-F238E27FC236}">
-                <a16:creationId xmlns:a16="http://schemas.microsoft.com/office/drawing/2014/main" id="{EAC9BBB7-0B99-4BAB-8D09-38100C249CB4}"/>
+                <a16:creationId xmlns:a16="http://schemas.microsoft.com/office/drawing/2014/main" id="{64D3F367-8BEA-48AA-A3B1-0C327BC265B4}"/>
               </a:ext>
             </a:extLst>
           </p:cNvPr>
@@ -6737,7 +6732,7 @@
           <p:cNvPr id="15" name="">
             <a:extLst xmlns:a="http://schemas.openxmlformats.org/drawingml/2006/main">
               <a:ext uri="{FF2B5EF4-FFF2-40B4-BE49-F238E27FC236}">
-                <a16:creationId xmlns:a16="http://schemas.microsoft.com/office/drawing/2014/main" id="{C833EFF3-4AEA-4212-8530-0561B4637FDC}"/>
+                <a16:creationId xmlns:a16="http://schemas.microsoft.com/office/drawing/2014/main" id="{E4A9F6BB-D089-4593-869D-7F71CFC824E3}"/>
               </a:ext>
             </a:extLst>
           </p:cNvPr>
@@ -6770,7 +6765,7 @@
           <p:cNvPr id="16" name="">
             <a:extLst xmlns:a="http://schemas.openxmlformats.org/drawingml/2006/main">
               <a:ext uri="{FF2B5EF4-FFF2-40B4-BE49-F238E27FC236}">
-                <a16:creationId xmlns:a16="http://schemas.microsoft.com/office/drawing/2014/main" id="{13824204-CAC5-4ADF-93D9-3BD716CABD8B}"/>
+                <a16:creationId xmlns:a16="http://schemas.microsoft.com/office/drawing/2014/main" id="{D55D4A98-2B49-4552-9053-FAA37F58E2C4}"/>
               </a:ext>
             </a:extLst>
           </p:cNvPr>
@@ -6820,7 +6815,7 @@
           <p:cNvPr id="17" name="">
             <a:extLst xmlns:a="http://schemas.openxmlformats.org/drawingml/2006/main">
               <a:ext uri="{FF2B5EF4-FFF2-40B4-BE49-F238E27FC236}">
-                <a16:creationId xmlns:a16="http://schemas.microsoft.com/office/drawing/2014/main" id="{C7AC5467-C870-4762-823F-1FAE34007162}"/>
+                <a16:creationId xmlns:a16="http://schemas.microsoft.com/office/drawing/2014/main" id="{7EBB54E3-DEE6-43AE-B9F7-0FB859902E57}"/>
               </a:ext>
             </a:extLst>
           </p:cNvPr>
@@ -6904,7 +6899,7 @@
           <p:cNvPr id="18" name="">
             <a:extLst xmlns:a="http://schemas.openxmlformats.org/drawingml/2006/main">
               <a:ext uri="{FF2B5EF4-FFF2-40B4-BE49-F238E27FC236}">
-                <a16:creationId xmlns:a16="http://schemas.microsoft.com/office/drawing/2014/main" id="{F538051D-6026-418F-B35E-1D9DE7D3267A}"/>
+                <a16:creationId xmlns:a16="http://schemas.microsoft.com/office/drawing/2014/main" id="{FBC36612-6C56-43D4-98C6-E9A16450506E}"/>
               </a:ext>
             </a:extLst>
           </p:cNvPr>
@@ -6937,7 +6932,7 @@
           <p:cNvPr id="19" name="">
             <a:extLst xmlns:a="http://schemas.openxmlformats.org/drawingml/2006/main">
               <a:ext uri="{FF2B5EF4-FFF2-40B4-BE49-F238E27FC236}">
-                <a16:creationId xmlns:a16="http://schemas.microsoft.com/office/drawing/2014/main" id="{EFC2189D-E821-4E26-99DD-B1DC8D4137FC}"/>
+                <a16:creationId xmlns:a16="http://schemas.microsoft.com/office/drawing/2014/main" id="{F37671AE-CCF7-4DD0-A314-75CFB6B73B99}"/>
               </a:ext>
             </a:extLst>
           </p:cNvPr>
@@ -6987,7 +6982,7 @@
           <p:cNvPr id="20" name="">
             <a:extLst xmlns:a="http://schemas.openxmlformats.org/drawingml/2006/main">
               <a:ext uri="{FF2B5EF4-FFF2-40B4-BE49-F238E27FC236}">
-                <a16:creationId xmlns:a16="http://schemas.microsoft.com/office/drawing/2014/main" id="{36F218B3-C31B-41F3-A24D-84E4254F3721}"/>
+                <a16:creationId xmlns:a16="http://schemas.microsoft.com/office/drawing/2014/main" id="{6D179432-A939-4C26-8651-AB6C46F73CC9}"/>
               </a:ext>
             </a:extLst>
           </p:cNvPr>
@@ -7041,7 +7036,7 @@
           <p:cNvPr id="21" name="">
             <a:extLst xmlns:a="http://schemas.openxmlformats.org/drawingml/2006/main">
               <a:ext uri="{FF2B5EF4-FFF2-40B4-BE49-F238E27FC236}">
-                <a16:creationId xmlns:a16="http://schemas.microsoft.com/office/drawing/2014/main" id="{A5289A0E-749B-49BB-9A2C-B9867648B789}"/>
+                <a16:creationId xmlns:a16="http://schemas.microsoft.com/office/drawing/2014/main" id="{463EFA82-38F9-4992-B89F-0CDC00E53E84}"/>
               </a:ext>
             </a:extLst>
           </p:cNvPr>
@@ -7157,7 +7152,7 @@
     </p:spTree>
     <p:extLst>
       <p:ext uri="{BB962C8B-B14F-4D97-AF65-F5344CB8AC3E}">
-        <p14:creationId xmlns:p14="http://schemas.microsoft.com/office/powerpoint/2010/main" val="112626260"/>
+        <p14:creationId xmlns:p14="http://schemas.microsoft.com/office/powerpoint/2010/main" val="2074646783"/>
       </p:ext>
     </p:extLst>
   </p:cSld>
@@ -7188,7 +7183,7 @@
           <p:cNvPr id="30" name="">
             <a:extLst xmlns:a="http://schemas.openxmlformats.org/drawingml/2006/main">
               <a:ext uri="{FF2B5EF4-FFF2-40B4-BE49-F238E27FC236}">
-                <a16:creationId xmlns:a16="http://schemas.microsoft.com/office/drawing/2014/main" id="{97CD8576-C5AB-4390-B5D2-895164E362EE}"/>
+                <a16:creationId xmlns:a16="http://schemas.microsoft.com/office/drawing/2014/main" id="{409AD7E9-E8C8-48DD-B755-8358174996DC}"/>
               </a:ext>
             </a:extLst>
           </p:cNvPr>
@@ -7219,7 +7214,7 @@
           <p:cNvPr id="2" name="">
             <a:extLst xmlns:a="http://schemas.openxmlformats.org/drawingml/2006/main">
               <a:ext uri="{FF2B5EF4-FFF2-40B4-BE49-F238E27FC236}">
-                <a16:creationId xmlns:a16="http://schemas.microsoft.com/office/drawing/2014/main" id="{F67ABCFA-DA3F-478A-A5AB-2A92983EE7EF}"/>
+                <a16:creationId xmlns:a16="http://schemas.microsoft.com/office/drawing/2014/main" id="{6671B212-48E2-4F63-9B9A-700B9CA1B2B4}"/>
               </a:ext>
             </a:extLst>
           </p:cNvPr>
@@ -7259,7 +7254,7 @@
                   <a:srgbClr val="0F766E"/>
                 </a:solidFill>
               </a:rPr>
-              <a:t>PLANNED DEVELOPMENT CASES · SYNTHETIC</a:t>
+              <a:t>CURRENT CACHED FINDINGS · SYNTHETIC REHEARSAL</a:t>
             </a:r>
           </a:p>
         </p:txBody>
@@ -7269,7 +7264,7 @@
           <p:cNvPr id="3" name="">
             <a:extLst xmlns:a="http://schemas.openxmlformats.org/drawingml/2006/main">
               <a:ext uri="{FF2B5EF4-FFF2-40B4-BE49-F238E27FC236}">
-                <a16:creationId xmlns:a16="http://schemas.microsoft.com/office/drawing/2014/main" id="{FE3BC4A8-7337-415D-8232-7588D6B7C688}"/>
+                <a16:creationId xmlns:a16="http://schemas.microsoft.com/office/drawing/2014/main" id="{DEFBE2DE-AAB2-4551-8657-3C7F4B4095E8}"/>
               </a:ext>
             </a:extLst>
           </p:cNvPr>
@@ -7319,7 +7314,7 @@
           <p:cNvPr id="4" name="">
             <a:extLst xmlns:a="http://schemas.openxmlformats.org/drawingml/2006/main">
               <a:ext uri="{FF2B5EF4-FFF2-40B4-BE49-F238E27FC236}">
-                <a16:creationId xmlns:a16="http://schemas.microsoft.com/office/drawing/2014/main" id="{67E55A9E-F7D2-4CB8-B9F7-FE7A9BD7766F}"/>
+                <a16:creationId xmlns:a16="http://schemas.microsoft.com/office/drawing/2014/main" id="{5F459209-7471-4CC1-99E8-8CCA54801796}"/>
               </a:ext>
             </a:extLst>
           </p:cNvPr>
@@ -7350,7 +7345,7 @@
           <p:cNvPr id="5" name="">
             <a:extLst xmlns:a="http://schemas.openxmlformats.org/drawingml/2006/main">
               <a:ext uri="{FF2B5EF4-FFF2-40B4-BE49-F238E27FC236}">
-                <a16:creationId xmlns:a16="http://schemas.microsoft.com/office/drawing/2014/main" id="{C71BB27F-979F-4839-B3D6-16C8F1EE236D}"/>
+                <a16:creationId xmlns:a16="http://schemas.microsoft.com/office/drawing/2014/main" id="{F6EB4ECE-498A-4334-BE73-5FD19E0089EA}"/>
               </a:ext>
             </a:extLst>
           </p:cNvPr>
@@ -7400,7 +7395,7 @@
           <p:cNvPr id="6" name="">
             <a:extLst xmlns:a="http://schemas.openxmlformats.org/drawingml/2006/main">
               <a:ext uri="{FF2B5EF4-FFF2-40B4-BE49-F238E27FC236}">
-                <a16:creationId xmlns:a16="http://schemas.microsoft.com/office/drawing/2014/main" id="{8B2879FB-7BC1-4144-A14B-1031156935CD}"/>
+                <a16:creationId xmlns:a16="http://schemas.microsoft.com/office/drawing/2014/main" id="{1019A878-4666-4963-8003-12FA6406FE1F}"/>
               </a:ext>
             </a:extLst>
           </p:cNvPr>
@@ -7440,7 +7435,7 @@
                   <a:srgbClr val="102A43"/>
                 </a:solidFill>
               </a:rPr>
-              <a:t>Three planned cases make ambiguity executable</a:t>
+              <a:t>Three deterministic findings make ambiguity executable</a:t>
             </a:r>
           </a:p>
         </p:txBody>
@@ -7450,7 +7445,7 @@
           <p:cNvPr id="7" name="">
             <a:extLst xmlns:a="http://schemas.openxmlformats.org/drawingml/2006/main">
               <a:ext uri="{FF2B5EF4-FFF2-40B4-BE49-F238E27FC236}">
-                <a16:creationId xmlns:a16="http://schemas.microsoft.com/office/drawing/2014/main" id="{C6F37AC8-E3D1-49BF-88D1-D65F0B749A61}"/>
+                <a16:creationId xmlns:a16="http://schemas.microsoft.com/office/drawing/2014/main" id="{F087F4FF-3233-4FF2-A1DF-CB0AECC8FE82}"/>
               </a:ext>
             </a:extLst>
           </p:cNvPr>
@@ -7481,7 +7476,7 @@
           <p:cNvPr id="8" name="">
             <a:extLst xmlns:a="http://schemas.openxmlformats.org/drawingml/2006/main">
               <a:ext uri="{FF2B5EF4-FFF2-40B4-BE49-F238E27FC236}">
-                <a16:creationId xmlns:a16="http://schemas.microsoft.com/office/drawing/2014/main" id="{1CE99137-656B-427F-9B06-1415134B17DF}"/>
+                <a16:creationId xmlns:a16="http://schemas.microsoft.com/office/drawing/2014/main" id="{4584D311-DDD2-442E-AD11-BD4B2A29C0D9}"/>
               </a:ext>
             </a:extLst>
           </p:cNvPr>
@@ -7531,7 +7526,7 @@
           <p:cNvPr id="9" name="">
             <a:extLst xmlns:a="http://schemas.openxmlformats.org/drawingml/2006/main">
               <a:ext uri="{FF2B5EF4-FFF2-40B4-BE49-F238E27FC236}">
-                <a16:creationId xmlns:a16="http://schemas.microsoft.com/office/drawing/2014/main" id="{6727E2A4-D291-4AC6-8D09-28A50D3CCF77}"/>
+                <a16:creationId xmlns:a16="http://schemas.microsoft.com/office/drawing/2014/main" id="{9C12B703-95FB-477C-9186-CC67A3FE4585}"/>
               </a:ext>
             </a:extLst>
           </p:cNvPr>
@@ -7571,7 +7566,7 @@
                   <a:srgbClr val="102A43"/>
                 </a:solidFill>
               </a:rPr>
-              <a:t>THRESHOLD GAP</a:t>
+              <a:t>RECEIPT REQUIREMENT</a:t>
             </a:r>
           </a:p>
         </p:txBody>
@@ -7581,7 +7576,7 @@
           <p:cNvPr id="10" name="">
             <a:extLst xmlns:a="http://schemas.openxmlformats.org/drawingml/2006/main">
               <a:ext uri="{FF2B5EF4-FFF2-40B4-BE49-F238E27FC236}">
-                <a16:creationId xmlns:a16="http://schemas.microsoft.com/office/drawing/2014/main" id="{DFD1AAC6-3854-49AF-9A0E-947D2D62ACEA}"/>
+                <a16:creationId xmlns:a16="http://schemas.microsoft.com/office/drawing/2014/main" id="{262BEC3D-06C3-46D3-AAB0-4CF298C49880}"/>
               </a:ext>
             </a:extLst>
           </p:cNvPr>
@@ -7621,7 +7616,7 @@
                   <a:srgbClr val="627D8C"/>
                 </a:solidFill>
               </a:rPr>
-              <a:t>SGD 50.00 receipt claim</a:t>
+              <a:t>Deterministic baseline finding</a:t>
             </a:r>
           </a:p>
         </p:txBody>
@@ -7631,7 +7626,7 @@
           <p:cNvPr id="11" name="">
             <a:extLst xmlns:a="http://schemas.openxmlformats.org/drawingml/2006/main">
               <a:ext uri="{FF2B5EF4-FFF2-40B4-BE49-F238E27FC236}">
-                <a16:creationId xmlns:a16="http://schemas.microsoft.com/office/drawing/2014/main" id="{7EEB73A6-23C2-4E6C-BE52-4AFD260CF163}"/>
+                <a16:creationId xmlns:a16="http://schemas.microsoft.com/office/drawing/2014/main" id="{50D03BA4-844C-47F4-9D8F-4F2DB40C31EC}"/>
               </a:ext>
             </a:extLst>
           </p:cNvPr>
@@ -7671,7 +7666,7 @@
                   <a:srgbClr val="B74D4D"/>
                 </a:solidFill>
               </a:rPr>
-              <a:t>below 50 ≠ above 50</a:t>
+              <a:t>Visible witness + cited rules</a:t>
             </a:r>
           </a:p>
         </p:txBody>
@@ -7681,7 +7676,7 @@
           <p:cNvPr id="12" name="">
             <a:extLst xmlns:a="http://schemas.openxmlformats.org/drawingml/2006/main">
               <a:ext uri="{FF2B5EF4-FFF2-40B4-BE49-F238E27FC236}">
-                <a16:creationId xmlns:a16="http://schemas.microsoft.com/office/drawing/2014/main" id="{9E052C31-7502-48CA-B86F-917B281F63A5}"/>
+                <a16:creationId xmlns:a16="http://schemas.microsoft.com/office/drawing/2014/main" id="{A1FA5F9D-2FCD-490F-976B-DD709E657CC6}"/>
               </a:ext>
             </a:extLst>
           </p:cNvPr>
@@ -7721,7 +7716,7 @@
                   <a:srgbClr val="627D8C"/>
                 </a:solidFill>
               </a:rPr>
-              <a:t>Equality has no matching rule</a:t>
+              <a:t>Accepted by authored demo decision</a:t>
             </a:r>
           </a:p>
         </p:txBody>
@@ -7731,7 +7726,7 @@
           <p:cNvPr id="13" name="">
             <a:extLst xmlns:a="http://schemas.openxmlformats.org/drawingml/2006/main">
               <a:ext uri="{FF2B5EF4-FFF2-40B4-BE49-F238E27FC236}">
-                <a16:creationId xmlns:a16="http://schemas.microsoft.com/office/drawing/2014/main" id="{682B664E-0F05-4855-A623-B25403F9C218}"/>
+                <a16:creationId xmlns:a16="http://schemas.microsoft.com/office/drawing/2014/main" id="{0DACAC57-CA71-49D0-8F9E-CBE12809D0F8}"/>
               </a:ext>
             </a:extLst>
           </p:cNvPr>
@@ -7775,7 +7770,7 @@
                   <a:srgbClr val="B7791F"/>
                 </a:solidFill>
               </a:rPr>
-              <a:t>TRACE + CITATION PENDING</a:t>
+              <a:t>FROZEN CAPTURE PENDING</a:t>
             </a:r>
           </a:p>
         </p:txBody>
@@ -7785,7 +7780,7 @@
           <p:cNvPr id="14" name="">
             <a:extLst xmlns:a="http://schemas.openxmlformats.org/drawingml/2006/main">
               <a:ext uri="{FF2B5EF4-FFF2-40B4-BE49-F238E27FC236}">
-                <a16:creationId xmlns:a16="http://schemas.microsoft.com/office/drawing/2014/main" id="{7E8FAF51-1432-4191-87F3-1B2E2B470949}"/>
+                <a16:creationId xmlns:a16="http://schemas.microsoft.com/office/drawing/2014/main" id="{A4DC0F55-B6E2-484E-9824-7D1B5C5140EA}"/>
               </a:ext>
             </a:extLst>
           </p:cNvPr>
@@ -7816,7 +7811,7 @@
           <p:cNvPr id="15" name="">
             <a:extLst xmlns:a="http://schemas.openxmlformats.org/drawingml/2006/main">
               <a:ext uri="{FF2B5EF4-FFF2-40B4-BE49-F238E27FC236}">
-                <a16:creationId xmlns:a16="http://schemas.microsoft.com/office/drawing/2014/main" id="{30F57C69-34C1-4E2E-9D3E-0FF7525BB591}"/>
+                <a16:creationId xmlns:a16="http://schemas.microsoft.com/office/drawing/2014/main" id="{009E27A4-A296-4790-B68B-C891E3A0BBC2}"/>
               </a:ext>
             </a:extLst>
           </p:cNvPr>
@@ -7866,7 +7861,7 @@
           <p:cNvPr id="16" name="">
             <a:extLst xmlns:a="http://schemas.openxmlformats.org/drawingml/2006/main">
               <a:ext uri="{FF2B5EF4-FFF2-40B4-BE49-F238E27FC236}">
-                <a16:creationId xmlns:a16="http://schemas.microsoft.com/office/drawing/2014/main" id="{71B1F6CB-D189-4B9F-867B-8B635F426EA4}"/>
+                <a16:creationId xmlns:a16="http://schemas.microsoft.com/office/drawing/2014/main" id="{6568EF74-774C-457E-917D-90784852A75A}"/>
               </a:ext>
             </a:extLst>
           </p:cNvPr>
@@ -7906,7 +7901,7 @@
                   <a:srgbClr val="102A43"/>
                 </a:solidFill>
               </a:rPr>
-              <a:t>HOTEL CONFLICT</a:t>
+              <a:t>APPROVAL REQUIREMENT</a:t>
             </a:r>
           </a:p>
         </p:txBody>
@@ -7916,7 +7911,7 @@
           <p:cNvPr id="17" name="">
             <a:extLst xmlns:a="http://schemas.openxmlformats.org/drawingml/2006/main">
               <a:ext uri="{FF2B5EF4-FFF2-40B4-BE49-F238E27FC236}">
-                <a16:creationId xmlns:a16="http://schemas.microsoft.com/office/drawing/2014/main" id="{BC69DC48-5005-4948-975D-797894D47A61}"/>
+                <a16:creationId xmlns:a16="http://schemas.microsoft.com/office/drawing/2014/main" id="{40F7CD43-592A-4C02-BFC5-CF4ABBF205F2}"/>
               </a:ext>
             </a:extLst>
           </p:cNvPr>
@@ -7956,7 +7951,7 @@
                   <a:srgbClr val="627D8C"/>
                 </a:solidFill>
               </a:rPr>
-              <a:t>International hotel · SGD 249.00</a:t>
+              <a:t>Deterministic baseline finding</a:t>
             </a:r>
           </a:p>
         </p:txBody>
@@ -7966,7 +7961,7 @@
           <p:cNvPr id="18" name="">
             <a:extLst xmlns:a="http://schemas.openxmlformats.org/drawingml/2006/main">
               <a:ext uri="{FF2B5EF4-FFF2-40B4-BE49-F238E27FC236}">
-                <a16:creationId xmlns:a16="http://schemas.microsoft.com/office/drawing/2014/main" id="{82CB6E75-4EE7-40E2-8F5E-5A47F171AE10}"/>
+                <a16:creationId xmlns:a16="http://schemas.microsoft.com/office/drawing/2014/main" id="{8BD35D09-D66B-4B10-8560-DFF49134C3E4}"/>
               </a:ext>
             </a:extLst>
           </p:cNvPr>
@@ -8006,7 +8001,7 @@
                   <a:srgbClr val="0F766E"/>
                 </a:solidFill>
               </a:rPr>
-              <a:t>no approval ↔ manager approval</a:t>
+              <a:t>Visible witness + cited rules</a:t>
             </a:r>
           </a:p>
         </p:txBody>
@@ -8016,7 +8011,7 @@
           <p:cNvPr id="19" name="">
             <a:extLst xmlns:a="http://schemas.openxmlformats.org/drawingml/2006/main">
               <a:ext uri="{FF2B5EF4-FFF2-40B4-BE49-F238E27FC236}">
-                <a16:creationId xmlns:a16="http://schemas.microsoft.com/office/drawing/2014/main" id="{F1583C03-D66C-4C17-9FCC-66EEDAB34EDC}"/>
+                <a16:creationId xmlns:a16="http://schemas.microsoft.com/office/drawing/2014/main" id="{2ADAAE61-07F4-42A0-B889-93FF7EBF42CE}"/>
               </a:ext>
             </a:extLst>
           </p:cNvPr>
@@ -8056,7 +8051,7 @@
                   <a:srgbClr val="627D8C"/>
                 </a:solidFill>
               </a:rPr>
-              <a:t>No override resolves the clash</a:t>
+              <a:t>Accepted by authored demo decision</a:t>
             </a:r>
           </a:p>
         </p:txBody>
@@ -8066,7 +8061,7 @@
           <p:cNvPr id="20" name="">
             <a:extLst xmlns:a="http://schemas.openxmlformats.org/drawingml/2006/main">
               <a:ext uri="{FF2B5EF4-FFF2-40B4-BE49-F238E27FC236}">
-                <a16:creationId xmlns:a16="http://schemas.microsoft.com/office/drawing/2014/main" id="{AD7ACD03-12B4-45F4-9FB5-A337B1F51CEF}"/>
+                <a16:creationId xmlns:a16="http://schemas.microsoft.com/office/drawing/2014/main" id="{1A83C2C4-B7D2-4AB4-A524-1DC54260F60B}"/>
               </a:ext>
             </a:extLst>
           </p:cNvPr>
@@ -8110,7 +8105,7 @@
                   <a:srgbClr val="B7791F"/>
                 </a:solidFill>
               </a:rPr>
-              <a:t>TRACE + CITATION PENDING</a:t>
+              <a:t>FROZEN CAPTURE PENDING</a:t>
             </a:r>
           </a:p>
         </p:txBody>
@@ -8120,7 +8115,7 @@
           <p:cNvPr id="21" name="">
             <a:extLst xmlns:a="http://schemas.openxmlformats.org/drawingml/2006/main">
               <a:ext uri="{FF2B5EF4-FFF2-40B4-BE49-F238E27FC236}">
-                <a16:creationId xmlns:a16="http://schemas.microsoft.com/office/drawing/2014/main" id="{EF67C0D3-8774-4B70-868B-EAA5FD4D5C8A}"/>
+                <a16:creationId xmlns:a16="http://schemas.microsoft.com/office/drawing/2014/main" id="{377B43CF-8B46-4EBC-8788-BCC4795507C9}"/>
               </a:ext>
             </a:extLst>
           </p:cNvPr>
@@ -8151,7 +8146,7 @@
           <p:cNvPr id="22" name="">
             <a:extLst xmlns:a="http://schemas.openxmlformats.org/drawingml/2006/main">
               <a:ext uri="{FF2B5EF4-FFF2-40B4-BE49-F238E27FC236}">
-                <a16:creationId xmlns:a16="http://schemas.microsoft.com/office/drawing/2014/main" id="{9ED0230B-E1CA-412A-A84E-F64EABD9DD7A}"/>
+                <a16:creationId xmlns:a16="http://schemas.microsoft.com/office/drawing/2014/main" id="{78CD7C5C-30A9-4C2D-A82D-435520E6A851}"/>
               </a:ext>
             </a:extLst>
           </p:cNvPr>
@@ -8201,7 +8196,7 @@
           <p:cNvPr id="23" name="">
             <a:extLst xmlns:a="http://schemas.openxmlformats.org/drawingml/2006/main">
               <a:ext uri="{FF2B5EF4-FFF2-40B4-BE49-F238E27FC236}">
-                <a16:creationId xmlns:a16="http://schemas.microsoft.com/office/drawing/2014/main" id="{30674CA9-0504-4A28-93CC-15EAAA5D1ACB}"/>
+                <a16:creationId xmlns:a16="http://schemas.microsoft.com/office/drawing/2014/main" id="{C803B438-9976-4A2A-A52A-3B92D6A14BA6}"/>
               </a:ext>
             </a:extLst>
           </p:cNvPr>
@@ -8241,7 +8236,7 @@
                   <a:srgbClr val="102A43"/>
                 </a:solidFill>
               </a:rPr>
-              <a:t>DAILY CAP BREACH</a:t>
+              <a:t>DAILY CATEGORY CAP</a:t>
             </a:r>
           </a:p>
         </p:txBody>
@@ -8251,7 +8246,7 @@
           <p:cNvPr id="24" name="">
             <a:extLst xmlns:a="http://schemas.openxmlformats.org/drawingml/2006/main">
               <a:ext uri="{FF2B5EF4-FFF2-40B4-BE49-F238E27FC236}">
-                <a16:creationId xmlns:a16="http://schemas.microsoft.com/office/drawing/2014/main" id="{B5FEEA49-A5A3-42FB-8E64-242DB67A42EC}"/>
+                <a16:creationId xmlns:a16="http://schemas.microsoft.com/office/drawing/2014/main" id="{F83D6ECD-B34D-4906-B25D-88D67216CFCE}"/>
               </a:ext>
             </a:extLst>
           </p:cNvPr>
@@ -8291,7 +8286,7 @@
                   <a:srgbClr val="627D8C"/>
                 </a:solidFill>
               </a:rPr>
-              <a:t>Meal SGD 60 + prior SGD 50</a:t>
+              <a:t>Deterministic baseline finding</a:t>
             </a:r>
           </a:p>
         </p:txBody>
@@ -8301,7 +8296,7 @@
           <p:cNvPr id="25" name="">
             <a:extLst xmlns:a="http://schemas.openxmlformats.org/drawingml/2006/main">
               <a:ext uri="{FF2B5EF4-FFF2-40B4-BE49-F238E27FC236}">
-                <a16:creationId xmlns:a16="http://schemas.microsoft.com/office/drawing/2014/main" id="{F5D4A483-5CAD-42F6-98C6-4E2E1153BDA2}"/>
+                <a16:creationId xmlns:a16="http://schemas.microsoft.com/office/drawing/2014/main" id="{94C3F1ED-88E5-4E30-A8DF-384A4312B74E}"/>
               </a:ext>
             </a:extLst>
           </p:cNvPr>
@@ -8341,7 +8336,7 @@
                   <a:srgbClr val="0F766E"/>
                 </a:solidFill>
               </a:rPr>
-              <a:t>eligible per claim → daily total 110</a:t>
+              <a:t>Visible witness + cited intent</a:t>
             </a:r>
           </a:p>
         </p:txBody>
@@ -8351,7 +8346,7 @@
           <p:cNvPr id="26" name="">
             <a:extLst xmlns:a="http://schemas.openxmlformats.org/drawingml/2006/main">
               <a:ext uri="{FF2B5EF4-FFF2-40B4-BE49-F238E27FC236}">
-                <a16:creationId xmlns:a16="http://schemas.microsoft.com/office/drawing/2014/main" id="{D1E2588E-6D77-40F9-84F5-33CFF17FAC6C}"/>
+                <a16:creationId xmlns:a16="http://schemas.microsoft.com/office/drawing/2014/main" id="{F7622E9B-2E44-4D8A-8231-53CD214A8E58}"/>
               </a:ext>
             </a:extLst>
           </p:cNvPr>
@@ -8391,7 +8386,7 @@
                   <a:srgbClr val="627D8C"/>
                 </a:solidFill>
               </a:rPr>
-              <a:t>Confirmed daily intent is breached</a:t>
+              <a:t>Accepted by authored demo decision</a:t>
             </a:r>
           </a:p>
         </p:txBody>
@@ -8401,7 +8396,7 @@
           <p:cNvPr id="27" name="">
             <a:extLst xmlns:a="http://schemas.openxmlformats.org/drawingml/2006/main">
               <a:ext uri="{FF2B5EF4-FFF2-40B4-BE49-F238E27FC236}">
-                <a16:creationId xmlns:a16="http://schemas.microsoft.com/office/drawing/2014/main" id="{81A6C0CE-D59C-43CF-A4D7-09348DE61703}"/>
+                <a16:creationId xmlns:a16="http://schemas.microsoft.com/office/drawing/2014/main" id="{74CF633F-C68A-463F-8EA4-5B00DC322E60}"/>
               </a:ext>
             </a:extLst>
           </p:cNvPr>
@@ -8445,7 +8440,7 @@
                   <a:srgbClr val="B7791F"/>
                 </a:solidFill>
               </a:rPr>
-              <a:t>TRACE + CITATION PENDING</a:t>
+              <a:t>FROZEN CAPTURE PENDING</a:t>
             </a:r>
           </a:p>
         </p:txBody>
@@ -8455,7 +8450,7 @@
           <p:cNvPr id="28" name="">
             <a:extLst xmlns:a="http://schemas.openxmlformats.org/drawingml/2006/main">
               <a:ext uri="{FF2B5EF4-FFF2-40B4-BE49-F238E27FC236}">
-                <a16:creationId xmlns:a16="http://schemas.microsoft.com/office/drawing/2014/main" id="{7A2DDC26-E0B7-47A4-A346-1B2463F2C77E}"/>
+                <a16:creationId xmlns:a16="http://schemas.microsoft.com/office/drawing/2014/main" id="{2DCFA060-C9C7-410F-8D45-1961E0FDB4FD}"/>
               </a:ext>
             </a:extLst>
           </p:cNvPr>
@@ -8495,7 +8490,7 @@
                   <a:srgbClr val="B7791F"/>
                 </a:solidFill>
               </a:rPr>
-              <a:t>PLANNED</a:t>
+              <a:t>CACHED</a:t>
             </a:r>
           </a:p>
         </p:txBody>
@@ -8505,7 +8500,7 @@
           <p:cNvPr id="29" name="">
             <a:extLst xmlns:a="http://schemas.openxmlformats.org/drawingml/2006/main">
               <a:ext uri="{FF2B5EF4-FFF2-40B4-BE49-F238E27FC236}">
-                <a16:creationId xmlns:a16="http://schemas.microsoft.com/office/drawing/2014/main" id="{76D08839-B5D3-4622-BD4D-9FF63B9F757E}"/>
+                <a16:creationId xmlns:a16="http://schemas.microsoft.com/office/drawing/2014/main" id="{E59F1369-3019-437F-87DA-37B647E0A16C}"/>
               </a:ext>
             </a:extLst>
           </p:cNvPr>
@@ -8545,7 +8540,7 @@
                   <a:srgbClr val="243B53"/>
                 </a:solidFill>
               </a:rPr>
-              <a:t>Final witnesses, authoritative traces, and exact policy citations will be captured only from the verified build.</a:t>
+              <a:t>Current record: 3 baseline findings. Final witnesses, traces, and citations still require the frozen browser capture.</a:t>
             </a:r>
           </a:p>
         </p:txBody>
@@ -8553,7 +8548,7 @@
     </p:spTree>
     <p:extLst>
       <p:ext uri="{BB962C8B-B14F-4D97-AF65-F5344CB8AC3E}">
-        <p14:creationId xmlns:p14="http://schemas.microsoft.com/office/powerpoint/2010/main" val="1019433295"/>
+        <p14:creationId xmlns:p14="http://schemas.microsoft.com/office/powerpoint/2010/main" val="314726928"/>
       </p:ext>
     </p:extLst>
   </p:cSld>
@@ -8584,7 +8579,7 @@
           <p:cNvPr id="23" name="">
             <a:extLst xmlns:a="http://schemas.openxmlformats.org/drawingml/2006/main">
               <a:ext uri="{FF2B5EF4-FFF2-40B4-BE49-F238E27FC236}">
-                <a16:creationId xmlns:a16="http://schemas.microsoft.com/office/drawing/2014/main" id="{A1859ED9-2DAE-4B5E-B601-C0A21524C7D3}"/>
+                <a16:creationId xmlns:a16="http://schemas.microsoft.com/office/drawing/2014/main" id="{0169055C-C8B0-48D5-A7F9-225BAA6CB077}"/>
               </a:ext>
             </a:extLst>
           </p:cNvPr>
@@ -8615,7 +8610,7 @@
           <p:cNvPr id="2" name="">
             <a:extLst xmlns:a="http://schemas.openxmlformats.org/drawingml/2006/main">
               <a:ext uri="{FF2B5EF4-FFF2-40B4-BE49-F238E27FC236}">
-                <a16:creationId xmlns:a16="http://schemas.microsoft.com/office/drawing/2014/main" id="{C92713E9-F3D4-4B00-B3BE-4CA89BA86E4A}"/>
+                <a16:creationId xmlns:a16="http://schemas.microsoft.com/office/drawing/2014/main" id="{E8152208-59D1-474B-95AC-1AFCC0E7CA22}"/>
               </a:ext>
             </a:extLst>
           </p:cNvPr>
@@ -8655,7 +8650,7 @@
                   <a:srgbClr val="0F766E"/>
                 </a:solidFill>
               </a:rPr>
-              <a:t>EVIDENCE PLAN</a:t>
+              <a:t>MEASURED CACHED REHEARSAL · SYNTHETIC</a:t>
             </a:r>
           </a:p>
         </p:txBody>
@@ -8665,7 +8660,7 @@
           <p:cNvPr id="3" name="">
             <a:extLst xmlns:a="http://schemas.openxmlformats.org/drawingml/2006/main">
               <a:ext uri="{FF2B5EF4-FFF2-40B4-BE49-F238E27FC236}">
-                <a16:creationId xmlns:a16="http://schemas.microsoft.com/office/drawing/2014/main" id="{391F9671-D09D-4918-8FA5-9E4FCE5F34AC}"/>
+                <a16:creationId xmlns:a16="http://schemas.microsoft.com/office/drawing/2014/main" id="{596B7D38-7307-4D26-9354-872726297732}"/>
               </a:ext>
             </a:extLst>
           </p:cNvPr>
@@ -8715,7 +8710,7 @@
           <p:cNvPr id="4" name="">
             <a:extLst xmlns:a="http://schemas.openxmlformats.org/drawingml/2006/main">
               <a:ext uri="{FF2B5EF4-FFF2-40B4-BE49-F238E27FC236}">
-                <a16:creationId xmlns:a16="http://schemas.microsoft.com/office/drawing/2014/main" id="{9135FD3B-9F36-45F8-8049-FF1B09AF444F}"/>
+                <a16:creationId xmlns:a16="http://schemas.microsoft.com/office/drawing/2014/main" id="{57C1188C-A127-44AA-972B-FD42CCD07C39}"/>
               </a:ext>
             </a:extLst>
           </p:cNvPr>
@@ -8746,7 +8741,7 @@
           <p:cNvPr id="5" name="">
             <a:extLst xmlns:a="http://schemas.openxmlformats.org/drawingml/2006/main">
               <a:ext uri="{FF2B5EF4-FFF2-40B4-BE49-F238E27FC236}">
-                <a16:creationId xmlns:a16="http://schemas.microsoft.com/office/drawing/2014/main" id="{39183846-064D-4BB8-A814-8295194F4638}"/>
+                <a16:creationId xmlns:a16="http://schemas.microsoft.com/office/drawing/2014/main" id="{971DFF57-A320-461F-85F2-D9200AA843E9}"/>
               </a:ext>
             </a:extLst>
           </p:cNvPr>
@@ -8796,7 +8791,7 @@
           <p:cNvPr id="6" name="">
             <a:extLst xmlns:a="http://schemas.openxmlformats.org/drawingml/2006/main">
               <a:ext uri="{FF2B5EF4-FFF2-40B4-BE49-F238E27FC236}">
-                <a16:creationId xmlns:a16="http://schemas.microsoft.com/office/drawing/2014/main" id="{700627D9-6F1F-417C-AE21-E45B0C1079EB}"/>
+                <a16:creationId xmlns:a16="http://schemas.microsoft.com/office/drawing/2014/main" id="{D6BEEAF2-858A-4E6D-B3BB-08A83439D723}"/>
               </a:ext>
             </a:extLst>
           </p:cNvPr>
@@ -8836,7 +8831,7 @@
                   <a:srgbClr val="102A43"/>
                 </a:solidFill>
               </a:rPr>
-              <a:t>Measured results wait for a frozen evidence chain</a:t>
+              <a:t>3 findings become 0; all seven gates pass</a:t>
             </a:r>
           </a:p>
         </p:txBody>
@@ -8846,7 +8841,7 @@
           <p:cNvPr id="7" name="">
             <a:extLst xmlns:a="http://schemas.openxmlformats.org/drawingml/2006/main">
               <a:ext uri="{FF2B5EF4-FFF2-40B4-BE49-F238E27FC236}">
-                <a16:creationId xmlns:a16="http://schemas.microsoft.com/office/drawing/2014/main" id="{81817547-5CCF-4753-803B-9A713E457003}"/>
+                <a16:creationId xmlns:a16="http://schemas.microsoft.com/office/drawing/2014/main" id="{7964148C-A8F1-4DF3-A065-898E53D91F9F}"/>
               </a:ext>
             </a:extLst>
           </p:cNvPr>
@@ -8858,7 +8853,7 @@
         <p:spPr>
           <a:xfrm xmlns:a="http://schemas.openxmlformats.org/drawingml/2006/main">
             <a:off x="666750" y="1504950"/>
-            <a:ext cx="2419350" cy="323850"/>
+            <a:ext cx="3028950" cy="323850"/>
           </a:xfrm>
           <a:prstGeom xmlns:a="http://schemas.openxmlformats.org/drawingml/2006/main" prst="roundRect">
             <a:avLst>
@@ -8890,7 +8885,7 @@
                   <a:srgbClr val="B7791F"/>
                 </a:solidFill>
               </a:rPr>
-              <a:t>MEASURED RESULTS: PENDING</a:t>
+              <a:t>NOT FROZEN · NOT BLIND-ELIGIBLE</a:t>
             </a:r>
           </a:p>
         </p:txBody>
@@ -8900,7 +8895,7 @@
           <p:cNvPr id="8" name="">
             <a:extLst xmlns:a="http://schemas.openxmlformats.org/drawingml/2006/main">
               <a:ext uri="{FF2B5EF4-FFF2-40B4-BE49-F238E27FC236}">
-                <a16:creationId xmlns:a16="http://schemas.microsoft.com/office/drawing/2014/main" id="{DD8BFC31-6EED-4F12-9D89-1789123A3A87}"/>
+                <a16:creationId xmlns:a16="http://schemas.microsoft.com/office/drawing/2014/main" id="{778A20BC-EB8B-401B-8E70-6D3BB94BD1B0}"/>
               </a:ext>
             </a:extLst>
           </p:cNvPr>
@@ -8935,7 +8930,7 @@
           <p:cNvPr id="9" name="">
             <a:extLst xmlns:a="http://schemas.openxmlformats.org/drawingml/2006/main">
               <a:ext uri="{FF2B5EF4-FFF2-40B4-BE49-F238E27FC236}">
-                <a16:creationId xmlns:a16="http://schemas.microsoft.com/office/drawing/2014/main" id="{B89F2149-44D2-4ABC-A2F6-B8C01BC4E53D}"/>
+                <a16:creationId xmlns:a16="http://schemas.microsoft.com/office/drawing/2014/main" id="{091CEA89-A260-4EB9-B9E0-FC22D0B297B8}"/>
               </a:ext>
             </a:extLst>
           </p:cNvPr>
@@ -8975,7 +8970,7 @@
                   <a:srgbClr val="0F766E"/>
                 </a:solidFill>
               </a:rPr>
-              <a:t>DEVELOPMENT</a:t>
+              <a:t>BEFORE</a:t>
             </a:r>
           </a:p>
         </p:txBody>
@@ -8985,7 +8980,7 @@
           <p:cNvPr id="10" name="">
             <a:extLst xmlns:a="http://schemas.openxmlformats.org/drawingml/2006/main">
               <a:ext uri="{FF2B5EF4-FFF2-40B4-BE49-F238E27FC236}">
-                <a16:creationId xmlns:a16="http://schemas.microsoft.com/office/drawing/2014/main" id="{79A59213-BA87-42EB-94E6-62628C8B651F}"/>
+                <a16:creationId xmlns:a16="http://schemas.microsoft.com/office/drawing/2014/main" id="{1780A5D2-FD34-46F4-A8FB-72A3024BDB19}"/>
               </a:ext>
             </a:extLst>
           </p:cNvPr>
@@ -9025,7 +9020,7 @@
                   <a:srgbClr val="102A43"/>
                 </a:solidFill>
               </a:rPr>
-              <a:t>Known synthetic defects</a:t>
+              <a:t>3 findings</a:t>
             </a:r>
           </a:p>
         </p:txBody>
@@ -9035,7 +9030,7 @@
           <p:cNvPr id="11" name="">
             <a:extLst xmlns:a="http://schemas.openxmlformats.org/drawingml/2006/main">
               <a:ext uri="{FF2B5EF4-FFF2-40B4-BE49-F238E27FC236}">
-                <a16:creationId xmlns:a16="http://schemas.microsoft.com/office/drawing/2014/main" id="{BFB6EFDC-37AB-4F86-9D0E-23D9CC3203C3}"/>
+                <a16:creationId xmlns:a16="http://schemas.microsoft.com/office/drawing/2014/main" id="{2ADCA057-B5EA-45A7-B1A1-407A4A45A7B8}"/>
               </a:ext>
             </a:extLst>
           </p:cNvPr>
@@ -9075,7 +9070,7 @@
                   <a:srgbClr val="627D8C"/>
                 </a:solidFill>
               </a:rPr>
-              <a:t>Exact finding match</a:t>
+              <a:t>10 scenarios</a:t>
             </a:r>
           </a:p>
           <a:p xmlns:a="http://schemas.openxmlformats.org/drawingml/2006/main">
@@ -9092,7 +9087,7 @@
                   <a:srgbClr val="627D8C"/>
                 </a:solidFill>
               </a:rPr>
-              <a:t>Citation integrity</a:t>
+              <a:t>12 inconclusive assertions</a:t>
             </a:r>
           </a:p>
           <a:p xmlns:a="http://schemas.openxmlformats.org/drawingml/2006/main">
@@ -9109,7 +9104,7 @@
                   <a:srgbClr val="627D8C"/>
                 </a:solidFill>
               </a:rPr>
-              <a:t>Coverage + replay</a:t>
+              <a:t>11 gaps · 1 conflict</a:t>
             </a:r>
           </a:p>
           <a:p xmlns:a="http://schemas.openxmlformats.org/drawingml/2006/main">
@@ -9126,7 +9121,7 @@
                   <a:srgbClr val="627D8C"/>
                 </a:solidFill>
               </a:rPr>
-              <a:t>Same-suite patch gates</a:t>
+              <a:t>Minimum coverage satisfied</a:t>
             </a:r>
           </a:p>
         </p:txBody>
@@ -9136,7 +9131,7 @@
           <p:cNvPr id="12" name="">
             <a:extLst xmlns:a="http://schemas.openxmlformats.org/drawingml/2006/main">
               <a:ext uri="{FF2B5EF4-FFF2-40B4-BE49-F238E27FC236}">
-                <a16:creationId xmlns:a16="http://schemas.microsoft.com/office/drawing/2014/main" id="{29494C37-6795-45A9-AD07-472CA7772910}"/>
+                <a16:creationId xmlns:a16="http://schemas.microsoft.com/office/drawing/2014/main" id="{469A75B9-3FF4-41DE-B9C1-55105F941CB1}"/>
               </a:ext>
             </a:extLst>
           </p:cNvPr>
@@ -9171,7 +9166,7 @@
           <p:cNvPr id="13" name="">
             <a:extLst xmlns:a="http://schemas.openxmlformats.org/drawingml/2006/main">
               <a:ext uri="{FF2B5EF4-FFF2-40B4-BE49-F238E27FC236}">
-                <a16:creationId xmlns:a16="http://schemas.microsoft.com/office/drawing/2014/main" id="{6BF82353-F85D-4833-9CEF-492DC687B2AB}"/>
+                <a16:creationId xmlns:a16="http://schemas.microsoft.com/office/drawing/2014/main" id="{9AB2D82E-A140-4F8F-ABF9-A6E4D789AC3A}"/>
               </a:ext>
             </a:extLst>
           </p:cNvPr>
@@ -9211,7 +9206,7 @@
                   <a:srgbClr val="0F766E"/>
                 </a:solidFill>
               </a:rPr>
-              <a:t>CORRECTED CONTROL</a:t>
+              <a:t>AFTER</a:t>
             </a:r>
           </a:p>
         </p:txBody>
@@ -9221,7 +9216,7 @@
           <p:cNvPr id="14" name="">
             <a:extLst xmlns:a="http://schemas.openxmlformats.org/drawingml/2006/main">
               <a:ext uri="{FF2B5EF4-FFF2-40B4-BE49-F238E27FC236}">
-                <a16:creationId xmlns:a16="http://schemas.microsoft.com/office/drawing/2014/main" id="{8259C0F0-E572-42BA-80E4-702E974A02E5}"/>
+                <a16:creationId xmlns:a16="http://schemas.microsoft.com/office/drawing/2014/main" id="{44A9AD2F-B3B1-4819-89DE-F071A6BA2307}"/>
               </a:ext>
             </a:extLst>
           </p:cNvPr>
@@ -9261,7 +9256,7 @@
                   <a:srgbClr val="102A43"/>
                 </a:solidFill>
               </a:rPr>
-              <a:t>Regression challenge</a:t>
+              <a:t>0 findings</a:t>
             </a:r>
           </a:p>
         </p:txBody>
@@ -9271,7 +9266,7 @@
           <p:cNvPr id="15" name="">
             <a:extLst xmlns:a="http://schemas.openxmlformats.org/drawingml/2006/main">
               <a:ext uri="{FF2B5EF4-FFF2-40B4-BE49-F238E27FC236}">
-                <a16:creationId xmlns:a16="http://schemas.microsoft.com/office/drawing/2014/main" id="{3530ACC7-8868-4B59-9AC1-A6E70B34F902}"/>
+                <a16:creationId xmlns:a16="http://schemas.microsoft.com/office/drawing/2014/main" id="{01FDECEA-C63D-4B2F-94FE-EA544382CDF0}"/>
               </a:ext>
             </a:extLst>
           </p:cNvPr>
@@ -9311,7 +9306,7 @@
                   <a:srgbClr val="627D8C"/>
                 </a:solidFill>
               </a:rPr>
-              <a:t>No confirmed target defect</a:t>
+              <a:t>Same frozen suite</a:t>
             </a:r>
           </a:p>
           <a:p xmlns:a="http://schemas.openxmlformats.org/drawingml/2006/main">
@@ -9328,7 +9323,7 @@
                   <a:srgbClr val="627D8C"/>
                 </a:solidFill>
               </a:rPr>
-              <a:t>Protected assertions</a:t>
+              <a:t>12 passing assertions</a:t>
             </a:r>
           </a:p>
           <a:p xmlns:a="http://schemas.openxmlformats.org/drawingml/2006/main">
@@ -9345,7 +9340,7 @@
                   <a:srgbClr val="627D8C"/>
                 </a:solidFill>
               </a:rPr>
-              <a:t>No new gaps or conflicts</a:t>
+              <a:t>0 gaps · 0 conflicts</a:t>
             </a:r>
           </a:p>
           <a:p xmlns:a="http://schemas.openxmlformats.org/drawingml/2006/main">
@@ -9362,7 +9357,7 @@
                   <a:srgbClr val="627D8C"/>
                 </a:solidFill>
               </a:rPr>
-              <a:t>Same engine + suite</a:t>
+              <a:t>7 / 7 gates true</a:t>
             </a:r>
           </a:p>
         </p:txBody>
@@ -9372,7 +9367,7 @@
           <p:cNvPr id="16" name="">
             <a:extLst xmlns:a="http://schemas.openxmlformats.org/drawingml/2006/main">
               <a:ext uri="{FF2B5EF4-FFF2-40B4-BE49-F238E27FC236}">
-                <a16:creationId xmlns:a16="http://schemas.microsoft.com/office/drawing/2014/main" id="{2BA8D7DB-8CC3-42F4-9CEE-7F3CA937F455}"/>
+                <a16:creationId xmlns:a16="http://schemas.microsoft.com/office/drawing/2014/main" id="{B0A10DCC-5020-45A4-B40B-37B8903F3826}"/>
               </a:ext>
             </a:extLst>
           </p:cNvPr>
@@ -9407,7 +9402,7 @@
           <p:cNvPr id="17" name="">
             <a:extLst xmlns:a="http://schemas.openxmlformats.org/drawingml/2006/main">
               <a:ext uri="{FF2B5EF4-FFF2-40B4-BE49-F238E27FC236}">
-                <a16:creationId xmlns:a16="http://schemas.microsoft.com/office/drawing/2014/main" id="{271EEC19-B05C-4DDC-853C-1A18C138206C}"/>
+                <a16:creationId xmlns:a16="http://schemas.microsoft.com/office/drawing/2014/main" id="{7C935CB1-8010-4393-A9E3-937861D5B67E}"/>
               </a:ext>
             </a:extLst>
           </p:cNvPr>
@@ -9447,7 +9442,7 @@
                   <a:srgbClr val="B7791F"/>
                 </a:solidFill>
               </a:rPr>
-              <a:t>BLIND</a:t>
+              <a:t>PROVENANCE</a:t>
             </a:r>
           </a:p>
         </p:txBody>
@@ -9457,7 +9452,7 @@
           <p:cNvPr id="18" name="">
             <a:extLst xmlns:a="http://schemas.openxmlformats.org/drawingml/2006/main">
               <a:ext uri="{FF2B5EF4-FFF2-40B4-BE49-F238E27FC236}">
-                <a16:creationId xmlns:a16="http://schemas.microsoft.com/office/drawing/2014/main" id="{7C143D60-9098-437C-8515-14F40A2923C1}"/>
+                <a16:creationId xmlns:a16="http://schemas.microsoft.com/office/drawing/2014/main" id="{E715120B-1783-4CC6-A90C-063EDDBD16F4}"/>
               </a:ext>
             </a:extLst>
           </p:cNvPr>
@@ -9497,7 +9492,7 @@
                   <a:srgbClr val="102A43"/>
                 </a:solidFill>
               </a:rPr>
-              <a:t>Late-sealed candidate</a:t>
+              <a:t>Cached rehearsal</a:t>
             </a:r>
           </a:p>
         </p:txBody>
@@ -9507,7 +9502,7 @@
           <p:cNvPr id="19" name="">
             <a:extLst xmlns:a="http://schemas.openxmlformats.org/drawingml/2006/main">
               <a:ext uri="{FF2B5EF4-FFF2-40B4-BE49-F238E27FC236}">
-                <a16:creationId xmlns:a16="http://schemas.microsoft.com/office/drawing/2014/main" id="{1D5D0439-2D38-4DA2-B041-92066F39FAE8}"/>
+                <a16:creationId xmlns:a16="http://schemas.microsoft.com/office/drawing/2014/main" id="{4EC9F080-0EBA-494F-97AE-1829FB5AA83E}"/>
               </a:ext>
             </a:extLst>
           </p:cNvPr>
@@ -9547,7 +9542,7 @@
                   <a:srgbClr val="627D8C"/>
                 </a:solidFill>
               </a:rPr>
-              <a:t>Human review pending</a:t>
+              <a:t>4 scripted model responses</a:t>
             </a:r>
           </a:p>
           <a:p xmlns:a="http://schemas.openxmlformats.org/drawingml/2006/main">
@@ -9564,7 +9559,7 @@
                   <a:srgbClr val="627D8C"/>
                 </a:solidFill>
               </a:rPr>
-              <a:t>Scoring-ineligible</a:t>
+              <a:t>0 actual provider calls</a:t>
             </a:r>
           </a:p>
           <a:p xmlns:a="http://schemas.openxmlformats.org/drawingml/2006/main">
@@ -9581,7 +9576,7 @@
                   <a:srgbClr val="627D8C"/>
                 </a:solidFill>
               </a:rPr>
-              <a:t>First-run custody required</a:t>
+              <a:t>Synthetic data</a:t>
             </a:r>
           </a:p>
           <a:p xmlns:a="http://schemas.openxmlformats.org/drawingml/2006/main">
@@ -9598,7 +9593,7 @@
                   <a:srgbClr val="627D8C"/>
                 </a:solidFill>
               </a:rPr>
-              <a:t>No headline claim</a:t>
+              <a:t>Blind-scoring-ineligible</a:t>
             </a:r>
           </a:p>
         </p:txBody>
@@ -9608,7 +9603,7 @@
           <p:cNvPr id="20" name="">
             <a:extLst xmlns:a="http://schemas.openxmlformats.org/drawingml/2006/main">
               <a:ext uri="{FF2B5EF4-FFF2-40B4-BE49-F238E27FC236}">
-                <a16:creationId xmlns:a16="http://schemas.microsoft.com/office/drawing/2014/main" id="{0A059E7B-F084-4851-B1F0-072A02F96F7B}"/>
+                <a16:creationId xmlns:a16="http://schemas.microsoft.com/office/drawing/2014/main" id="{83D98CA5-BD98-4426-8D95-D6B0E4E3B942}"/>
               </a:ext>
             </a:extLst>
           </p:cNvPr>
@@ -9648,7 +9643,7 @@
                   <a:srgbClr val="627D8C"/>
                 </a:solidFill>
               </a:rPr>
-              <a:t>Release chain</a:t>
+              <a:t>Final chain</a:t>
             </a:r>
           </a:p>
         </p:txBody>
@@ -9658,7 +9653,7 @@
           <p:cNvPr id="21" name="">
             <a:extLst xmlns:a="http://schemas.openxmlformats.org/drawingml/2006/main">
               <a:ext uri="{FF2B5EF4-FFF2-40B4-BE49-F238E27FC236}">
-                <a16:creationId xmlns:a16="http://schemas.microsoft.com/office/drawing/2014/main" id="{8AA54526-CDD2-4A0A-8BEA-C3F2DACA3651}"/>
+                <a16:creationId xmlns:a16="http://schemas.microsoft.com/office/drawing/2014/main" id="{44AC8C7B-8AA1-4EC2-AB9F-947937B5CA8F}"/>
               </a:ext>
             </a:extLst>
           </p:cNvPr>
@@ -9698,7 +9693,7 @@
                   <a:srgbClr val="243B53"/>
                 </a:solidFill>
               </a:rPr>
-              <a:t>Gate B report  →  demo-core-v1  →  6-hour freeze  →  evidence capture  →  reviewer checks</a:t>
+              <a:t>Gate B  →  demo-core-v1  →  6-hour freeze  →  browser capture  →  two human reviews</a:t>
             </a:r>
           </a:p>
         </p:txBody>
@@ -9708,7 +9703,7 @@
           <p:cNvPr id="22" name="">
             <a:extLst xmlns:a="http://schemas.openxmlformats.org/drawingml/2006/main">
               <a:ext uri="{FF2B5EF4-FFF2-40B4-BE49-F238E27FC236}">
-                <a16:creationId xmlns:a16="http://schemas.microsoft.com/office/drawing/2014/main" id="{487F9452-B833-462B-91D0-DE9089251415}"/>
+                <a16:creationId xmlns:a16="http://schemas.microsoft.com/office/drawing/2014/main" id="{BE2DB7D9-0691-445A-B782-9B7077276DD0}"/>
               </a:ext>
             </a:extLst>
           </p:cNvPr>
@@ -9748,7 +9743,7 @@
                   <a:srgbClr val="0F766E"/>
                 </a:solidFill>
               </a:rPr>
-              <a:t>Results will be reported with their frozen suite, engine, and source evidence.</a:t>
+              <a:t>Until that chain completes, these numbers remain rehearsal evidence — not headline blind results.</a:t>
             </a:r>
           </a:p>
         </p:txBody>
@@ -9756,7 +9751,7 @@
     </p:spTree>
     <p:extLst>
       <p:ext uri="{BB962C8B-B14F-4D97-AF65-F5344CB8AC3E}">
-        <p14:creationId xmlns:p14="http://schemas.microsoft.com/office/powerpoint/2010/main" val="1629540789"/>
+        <p14:creationId xmlns:p14="http://schemas.microsoft.com/office/powerpoint/2010/main" val="974564774"/>
       </p:ext>
     </p:extLst>
   </p:cSld>
@@ -9787,7 +9782,7 @@
           <p:cNvPr id="23" name="">
             <a:extLst xmlns:a="http://schemas.openxmlformats.org/drawingml/2006/main">
               <a:ext uri="{FF2B5EF4-FFF2-40B4-BE49-F238E27FC236}">
-                <a16:creationId xmlns:a16="http://schemas.microsoft.com/office/drawing/2014/main" id="{AC47808C-75D2-414D-8E4A-E8071FE77511}"/>
+                <a16:creationId xmlns:a16="http://schemas.microsoft.com/office/drawing/2014/main" id="{7E3EFF88-1254-4EAF-A490-3DFDAB7B43A4}"/>
               </a:ext>
             </a:extLst>
           </p:cNvPr>
@@ -9818,7 +9813,7 @@
           <p:cNvPr id="2" name="">
             <a:extLst xmlns:a="http://schemas.openxmlformats.org/drawingml/2006/main">
               <a:ext uri="{FF2B5EF4-FFF2-40B4-BE49-F238E27FC236}">
-                <a16:creationId xmlns:a16="http://schemas.microsoft.com/office/drawing/2014/main" id="{D138AD6C-093C-47FE-8350-2A122399E707}"/>
+                <a16:creationId xmlns:a16="http://schemas.microsoft.com/office/drawing/2014/main" id="{96DE1ED0-95FB-4A43-817C-18A51F4C6B09}"/>
               </a:ext>
             </a:extLst>
           </p:cNvPr>
@@ -9868,7 +9863,7 @@
           <p:cNvPr id="3" name="">
             <a:extLst xmlns:a="http://schemas.openxmlformats.org/drawingml/2006/main">
               <a:ext uri="{FF2B5EF4-FFF2-40B4-BE49-F238E27FC236}">
-                <a16:creationId xmlns:a16="http://schemas.microsoft.com/office/drawing/2014/main" id="{582AD39F-1325-418A-947C-969AA77C7C33}"/>
+                <a16:creationId xmlns:a16="http://schemas.microsoft.com/office/drawing/2014/main" id="{8C95B3B9-920B-4FE0-A11F-37160743B9BB}"/>
               </a:ext>
             </a:extLst>
           </p:cNvPr>
@@ -9918,7 +9913,7 @@
           <p:cNvPr id="4" name="">
             <a:extLst xmlns:a="http://schemas.openxmlformats.org/drawingml/2006/main">
               <a:ext uri="{FF2B5EF4-FFF2-40B4-BE49-F238E27FC236}">
-                <a16:creationId xmlns:a16="http://schemas.microsoft.com/office/drawing/2014/main" id="{C56A2D72-4727-41C0-9838-DA4F57AC767B}"/>
+                <a16:creationId xmlns:a16="http://schemas.microsoft.com/office/drawing/2014/main" id="{D137B0E0-7867-4350-A5DA-0641EA5004D0}"/>
               </a:ext>
             </a:extLst>
           </p:cNvPr>
@@ -9949,7 +9944,7 @@
           <p:cNvPr id="5" name="">
             <a:extLst xmlns:a="http://schemas.openxmlformats.org/drawingml/2006/main">
               <a:ext uri="{FF2B5EF4-FFF2-40B4-BE49-F238E27FC236}">
-                <a16:creationId xmlns:a16="http://schemas.microsoft.com/office/drawing/2014/main" id="{FD27C001-37D7-444C-BEE2-4DFC868895D3}"/>
+                <a16:creationId xmlns:a16="http://schemas.microsoft.com/office/drawing/2014/main" id="{C8515C52-137E-4BE4-B050-CDB32807469E}"/>
               </a:ext>
             </a:extLst>
           </p:cNvPr>
@@ -9999,7 +9994,7 @@
           <p:cNvPr id="6" name="">
             <a:extLst xmlns:a="http://schemas.openxmlformats.org/drawingml/2006/main">
               <a:ext uri="{FF2B5EF4-FFF2-40B4-BE49-F238E27FC236}">
-                <a16:creationId xmlns:a16="http://schemas.microsoft.com/office/drawing/2014/main" id="{EB878504-89E5-4891-936A-F32E9C53A216}"/>
+                <a16:creationId xmlns:a16="http://schemas.microsoft.com/office/drawing/2014/main" id="{67347A34-8F12-4F27-9E56-74672C76CFD5}"/>
               </a:ext>
             </a:extLst>
           </p:cNvPr>
@@ -10049,7 +10044,7 @@
           <p:cNvPr id="7" name="">
             <a:extLst xmlns:a="http://schemas.openxmlformats.org/drawingml/2006/main">
               <a:ext uri="{FF2B5EF4-FFF2-40B4-BE49-F238E27FC236}">
-                <a16:creationId xmlns:a16="http://schemas.microsoft.com/office/drawing/2014/main" id="{B3FB6180-A9E9-4AAD-8EE1-204B25365BDD}"/>
+                <a16:creationId xmlns:a16="http://schemas.microsoft.com/office/drawing/2014/main" id="{1C310F07-755B-42EB-9DDA-08DD7B48225B}"/>
               </a:ext>
             </a:extLst>
           </p:cNvPr>
@@ -10099,7 +10094,7 @@
           <p:cNvPr id="8" name="">
             <a:extLst xmlns:a="http://schemas.openxmlformats.org/drawingml/2006/main">
               <a:ext uri="{FF2B5EF4-FFF2-40B4-BE49-F238E27FC236}">
-                <a16:creationId xmlns:a16="http://schemas.microsoft.com/office/drawing/2014/main" id="{DB570758-6BFA-44E9-8A86-3CE57D691219}"/>
+                <a16:creationId xmlns:a16="http://schemas.microsoft.com/office/drawing/2014/main" id="{422EA2B9-622E-41B8-8E8D-E55895280884}"/>
               </a:ext>
             </a:extLst>
           </p:cNvPr>
@@ -10149,7 +10144,7 @@
           <p:cNvPr id="9" name="">
             <a:extLst xmlns:a="http://schemas.openxmlformats.org/drawingml/2006/main">
               <a:ext uri="{FF2B5EF4-FFF2-40B4-BE49-F238E27FC236}">
-                <a16:creationId xmlns:a16="http://schemas.microsoft.com/office/drawing/2014/main" id="{1B1B9E18-6F87-4E19-B171-17F6C30B05F2}"/>
+                <a16:creationId xmlns:a16="http://schemas.microsoft.com/office/drawing/2014/main" id="{A1219EE8-5FFB-4308-8241-8FFD6BE23876}"/>
               </a:ext>
             </a:extLst>
           </p:cNvPr>
@@ -10180,7 +10175,7 @@
           <p:cNvPr id="10" name="">
             <a:extLst xmlns:a="http://schemas.openxmlformats.org/drawingml/2006/main">
               <a:ext uri="{FF2B5EF4-FFF2-40B4-BE49-F238E27FC236}">
-                <a16:creationId xmlns:a16="http://schemas.microsoft.com/office/drawing/2014/main" id="{DC0F3316-E3F6-4F45-A6C7-73304C0A62A6}"/>
+                <a16:creationId xmlns:a16="http://schemas.microsoft.com/office/drawing/2014/main" id="{B6C08E99-6BDC-4FFE-9091-760E2DD81AF8}"/>
               </a:ext>
             </a:extLst>
           </p:cNvPr>
@@ -10230,7 +10225,7 @@
           <p:cNvPr id="11" name="">
             <a:extLst xmlns:a="http://schemas.openxmlformats.org/drawingml/2006/main">
               <a:ext uri="{FF2B5EF4-FFF2-40B4-BE49-F238E27FC236}">
-                <a16:creationId xmlns:a16="http://schemas.microsoft.com/office/drawing/2014/main" id="{F71AD072-844D-48DB-BFC8-7198924D02D0}"/>
+                <a16:creationId xmlns:a16="http://schemas.microsoft.com/office/drawing/2014/main" id="{EE077835-9645-4C79-8AF7-ED497D2CFB76}"/>
               </a:ext>
             </a:extLst>
           </p:cNvPr>
@@ -10284,7 +10279,7 @@
           <p:cNvPr id="12" name="">
             <a:extLst xmlns:a="http://schemas.openxmlformats.org/drawingml/2006/main">
               <a:ext uri="{FF2B5EF4-FFF2-40B4-BE49-F238E27FC236}">
-                <a16:creationId xmlns:a16="http://schemas.microsoft.com/office/drawing/2014/main" id="{A58CA782-3E8C-427D-B1B1-DBDCC3AF9620}"/>
+                <a16:creationId xmlns:a16="http://schemas.microsoft.com/office/drawing/2014/main" id="{A228B461-2341-4D36-8143-4B80F11AA2EB}"/>
               </a:ext>
             </a:extLst>
           </p:cNvPr>
@@ -10334,7 +10329,7 @@
           <p:cNvPr id="13" name="">
             <a:extLst xmlns:a="http://schemas.openxmlformats.org/drawingml/2006/main">
               <a:ext uri="{FF2B5EF4-FFF2-40B4-BE49-F238E27FC236}">
-                <a16:creationId xmlns:a16="http://schemas.microsoft.com/office/drawing/2014/main" id="{69F689EF-E6E6-417D-B00A-163B565A889E}"/>
+                <a16:creationId xmlns:a16="http://schemas.microsoft.com/office/drawing/2014/main" id="{B7631AF2-9FC2-4FA5-A6AB-0274AC056E7D}"/>
               </a:ext>
             </a:extLst>
           </p:cNvPr>
@@ -10384,7 +10379,7 @@
           <p:cNvPr id="14" name="">
             <a:extLst xmlns:a="http://schemas.openxmlformats.org/drawingml/2006/main">
               <a:ext uri="{FF2B5EF4-FFF2-40B4-BE49-F238E27FC236}">
-                <a16:creationId xmlns:a16="http://schemas.microsoft.com/office/drawing/2014/main" id="{194CB1ED-3958-4510-85E9-CC46A4B141AF}"/>
+                <a16:creationId xmlns:a16="http://schemas.microsoft.com/office/drawing/2014/main" id="{D4105BF7-83F0-4BBE-98F6-A2C192D76C26}"/>
               </a:ext>
             </a:extLst>
           </p:cNvPr>
@@ -10438,7 +10433,7 @@
           <p:cNvPr id="15" name="">
             <a:extLst xmlns:a="http://schemas.openxmlformats.org/drawingml/2006/main">
               <a:ext uri="{FF2B5EF4-FFF2-40B4-BE49-F238E27FC236}">
-                <a16:creationId xmlns:a16="http://schemas.microsoft.com/office/drawing/2014/main" id="{743D84D2-E03B-4E7A-81FC-588502F6E262}"/>
+                <a16:creationId xmlns:a16="http://schemas.microsoft.com/office/drawing/2014/main" id="{AF33AA69-0A19-4064-974B-084D7DD70F1D}"/>
               </a:ext>
             </a:extLst>
           </p:cNvPr>
@@ -10488,7 +10483,7 @@
           <p:cNvPr id="16" name="">
             <a:extLst xmlns:a="http://schemas.openxmlformats.org/drawingml/2006/main">
               <a:ext uri="{FF2B5EF4-FFF2-40B4-BE49-F238E27FC236}">
-                <a16:creationId xmlns:a16="http://schemas.microsoft.com/office/drawing/2014/main" id="{997B72E1-0B2D-44B9-86EC-2D1B6820A74C}"/>
+                <a16:creationId xmlns:a16="http://schemas.microsoft.com/office/drawing/2014/main" id="{879B1C6F-0646-48F4-B2B3-9D57364E2896}"/>
               </a:ext>
             </a:extLst>
           </p:cNvPr>
@@ -10538,7 +10533,7 @@
           <p:cNvPr id="17" name="">
             <a:extLst xmlns:a="http://schemas.openxmlformats.org/drawingml/2006/main">
               <a:ext uri="{FF2B5EF4-FFF2-40B4-BE49-F238E27FC236}">
-                <a16:creationId xmlns:a16="http://schemas.microsoft.com/office/drawing/2014/main" id="{60741CCC-C815-443C-963B-C2EA1EDA0B1E}"/>
+                <a16:creationId xmlns:a16="http://schemas.microsoft.com/office/drawing/2014/main" id="{D3AE0E0A-5FC4-4A90-90CC-14E65BBC31F3}"/>
               </a:ext>
             </a:extLst>
           </p:cNvPr>
@@ -10592,7 +10587,7 @@
           <p:cNvPr id="18" name="">
             <a:extLst xmlns:a="http://schemas.openxmlformats.org/drawingml/2006/main">
               <a:ext uri="{FF2B5EF4-FFF2-40B4-BE49-F238E27FC236}">
-                <a16:creationId xmlns:a16="http://schemas.microsoft.com/office/drawing/2014/main" id="{FADD0D70-D55B-4E48-B056-BDF5244B88F7}"/>
+                <a16:creationId xmlns:a16="http://schemas.microsoft.com/office/drawing/2014/main" id="{C0465556-3375-4ABF-A1C1-986DF885D75A}"/>
               </a:ext>
             </a:extLst>
           </p:cNvPr>
@@ -10642,7 +10637,7 @@
           <p:cNvPr id="19" name="">
             <a:extLst xmlns:a="http://schemas.openxmlformats.org/drawingml/2006/main">
               <a:ext uri="{FF2B5EF4-FFF2-40B4-BE49-F238E27FC236}">
-                <a16:creationId xmlns:a16="http://schemas.microsoft.com/office/drawing/2014/main" id="{F59609B7-7256-400A-B37B-2255FF762088}"/>
+                <a16:creationId xmlns:a16="http://schemas.microsoft.com/office/drawing/2014/main" id="{FDB3BDCF-6F17-469C-B1E5-8DF9DE623EFF}"/>
               </a:ext>
             </a:extLst>
           </p:cNvPr>
@@ -10692,7 +10687,7 @@
           <p:cNvPr id="20" name="">
             <a:extLst xmlns:a="http://schemas.openxmlformats.org/drawingml/2006/main">
               <a:ext uri="{FF2B5EF4-FFF2-40B4-BE49-F238E27FC236}">
-                <a16:creationId xmlns:a16="http://schemas.microsoft.com/office/drawing/2014/main" id="{82205ABD-74FC-46D4-A70A-C4F9D68CFC7E}"/>
+                <a16:creationId xmlns:a16="http://schemas.microsoft.com/office/drawing/2014/main" id="{F5ED8991-6166-47D7-A34F-7272663E615E}"/>
               </a:ext>
             </a:extLst>
           </p:cNvPr>
@@ -10746,7 +10741,7 @@
           <p:cNvPr id="21" name="">
             <a:extLst xmlns:a="http://schemas.openxmlformats.org/drawingml/2006/main">
               <a:ext uri="{FF2B5EF4-FFF2-40B4-BE49-F238E27FC236}">
-                <a16:creationId xmlns:a16="http://schemas.microsoft.com/office/drawing/2014/main" id="{4B0C2F12-AA6C-4366-873E-E8CC167AB293}"/>
+                <a16:creationId xmlns:a16="http://schemas.microsoft.com/office/drawing/2014/main" id="{AFD4D745-ADCE-4ED4-A461-5DB6BC4BEB2D}"/>
               </a:ext>
             </a:extLst>
           </p:cNvPr>
@@ -10796,7 +10791,7 @@
           <p:cNvPr id="22" name="">
             <a:extLst xmlns:a="http://schemas.openxmlformats.org/drawingml/2006/main">
               <a:ext uri="{FF2B5EF4-FFF2-40B4-BE49-F238E27FC236}">
-                <a16:creationId xmlns:a16="http://schemas.microsoft.com/office/drawing/2014/main" id="{0D2B3BFE-41FA-4324-BCDF-3D5ACE5108CC}"/>
+                <a16:creationId xmlns:a16="http://schemas.microsoft.com/office/drawing/2014/main" id="{64BD0F5C-C129-4201-B381-8894F5039138}"/>
               </a:ext>
             </a:extLst>
           </p:cNvPr>
@@ -10844,7 +10839,7 @@
     </p:spTree>
     <p:extLst>
       <p:ext uri="{BB962C8B-B14F-4D97-AF65-F5344CB8AC3E}">
-        <p14:creationId xmlns:p14="http://schemas.microsoft.com/office/powerpoint/2010/main" val="1292908065"/>
+        <p14:creationId xmlns:p14="http://schemas.microsoft.com/office/powerpoint/2010/main" val="829592114"/>
       </p:ext>
     </p:extLst>
   </p:cSld>
@@ -10875,7 +10870,7 @@
           <p:cNvPr id="14" name="">
             <a:extLst xmlns:a="http://schemas.openxmlformats.org/drawingml/2006/main">
               <a:ext uri="{FF2B5EF4-FFF2-40B4-BE49-F238E27FC236}">
-                <a16:creationId xmlns:a16="http://schemas.microsoft.com/office/drawing/2014/main" id="{21D4FEED-CAC5-4321-82EC-5BBA5ED22441}"/>
+                <a16:creationId xmlns:a16="http://schemas.microsoft.com/office/drawing/2014/main" id="{2D078901-3A7F-48FE-9957-7B01AFFCA37A}"/>
               </a:ext>
             </a:extLst>
           </p:cNvPr>
@@ -10906,7 +10901,7 @@
           <p:cNvPr id="2" name="">
             <a:extLst xmlns:a="http://schemas.openxmlformats.org/drawingml/2006/main">
               <a:ext uri="{FF2B5EF4-FFF2-40B4-BE49-F238E27FC236}">
-                <a16:creationId xmlns:a16="http://schemas.microsoft.com/office/drawing/2014/main" id="{6D064A93-AE4D-459B-AA95-C7D7FD7AAE59}"/>
+                <a16:creationId xmlns:a16="http://schemas.microsoft.com/office/drawing/2014/main" id="{1FB2BED6-F3AB-47FE-95AC-982E1CD2E7AA}"/>
               </a:ext>
             </a:extLst>
           </p:cNvPr>
@@ -10956,7 +10951,7 @@
           <p:cNvPr id="3" name="">
             <a:extLst xmlns:a="http://schemas.openxmlformats.org/drawingml/2006/main">
               <a:ext uri="{FF2B5EF4-FFF2-40B4-BE49-F238E27FC236}">
-                <a16:creationId xmlns:a16="http://schemas.microsoft.com/office/drawing/2014/main" id="{DE13CE0F-7B80-469A-B9D7-00E4A4574824}"/>
+                <a16:creationId xmlns:a16="http://schemas.microsoft.com/office/drawing/2014/main" id="{69D1E40E-E109-44A8-A19E-9E7C83788E83}"/>
               </a:ext>
             </a:extLst>
           </p:cNvPr>
@@ -11023,7 +11018,7 @@
           <p:cNvPr id="4" name="">
             <a:extLst xmlns:a="http://schemas.openxmlformats.org/drawingml/2006/main">
               <a:ext uri="{FF2B5EF4-FFF2-40B4-BE49-F238E27FC236}">
-                <a16:creationId xmlns:a16="http://schemas.microsoft.com/office/drawing/2014/main" id="{01A3C070-5982-4C1D-B551-F487F4871B26}"/>
+                <a16:creationId xmlns:a16="http://schemas.microsoft.com/office/drawing/2014/main" id="{F2D21AD7-B042-4AC4-A58B-311FF2E0D71A}"/>
               </a:ext>
             </a:extLst>
           </p:cNvPr>
@@ -11073,7 +11068,7 @@
           <p:cNvPr id="5" name="">
             <a:extLst xmlns:a="http://schemas.openxmlformats.org/drawingml/2006/main">
               <a:ext uri="{FF2B5EF4-FFF2-40B4-BE49-F238E27FC236}">
-                <a16:creationId xmlns:a16="http://schemas.microsoft.com/office/drawing/2014/main" id="{89515B09-02EF-47B3-B4E7-FD3AEDA93BDD}"/>
+                <a16:creationId xmlns:a16="http://schemas.microsoft.com/office/drawing/2014/main" id="{5CDC3809-9B9E-49B1-B784-935D083A001D}"/>
               </a:ext>
             </a:extLst>
           </p:cNvPr>
@@ -11123,7 +11118,7 @@
           <p:cNvPr id="6" name="">
             <a:extLst xmlns:a="http://schemas.openxmlformats.org/drawingml/2006/main">
               <a:ext uri="{FF2B5EF4-FFF2-40B4-BE49-F238E27FC236}">
-                <a16:creationId xmlns:a16="http://schemas.microsoft.com/office/drawing/2014/main" id="{8290ABE1-7CFC-4D78-A3FC-2AF0D1C0AFB1}"/>
+                <a16:creationId xmlns:a16="http://schemas.microsoft.com/office/drawing/2014/main" id="{AB964055-21FA-4F98-B83B-BE6AF1A25AA4}"/>
               </a:ext>
             </a:extLst>
           </p:cNvPr>
@@ -11154,7 +11149,7 @@
           <p:cNvPr id="7" name="">
             <a:extLst xmlns:a="http://schemas.openxmlformats.org/drawingml/2006/main">
               <a:ext uri="{FF2B5EF4-FFF2-40B4-BE49-F238E27FC236}">
-                <a16:creationId xmlns:a16="http://schemas.microsoft.com/office/drawing/2014/main" id="{1EE685C4-EF04-47AE-8B7F-819D8A0FEF30}"/>
+                <a16:creationId xmlns:a16="http://schemas.microsoft.com/office/drawing/2014/main" id="{D4E36F28-AE62-407C-A385-A7E2CA546E51}"/>
               </a:ext>
             </a:extLst>
           </p:cNvPr>
@@ -11204,7 +11199,7 @@
           <p:cNvPr id="8" name="">
             <a:extLst xmlns:a="http://schemas.openxmlformats.org/drawingml/2006/main">
               <a:ext uri="{FF2B5EF4-FFF2-40B4-BE49-F238E27FC236}">
-                <a16:creationId xmlns:a16="http://schemas.microsoft.com/office/drawing/2014/main" id="{36BB95DB-7F77-4905-9EEB-27AFEAAFA757}"/>
+                <a16:creationId xmlns:a16="http://schemas.microsoft.com/office/drawing/2014/main" id="{FEBFE631-FACB-4CB7-9A11-D2DE53CB5BEA}"/>
               </a:ext>
             </a:extLst>
           </p:cNvPr>
@@ -11322,7 +11317,7 @@
           <p:cNvPr id="9" name="">
             <a:extLst xmlns:a="http://schemas.openxmlformats.org/drawingml/2006/main">
               <a:ext uri="{FF2B5EF4-FFF2-40B4-BE49-F238E27FC236}">
-                <a16:creationId xmlns:a16="http://schemas.microsoft.com/office/drawing/2014/main" id="{84CB4349-138B-41E5-8162-28D5A21FD0C9}"/>
+                <a16:creationId xmlns:a16="http://schemas.microsoft.com/office/drawing/2014/main" id="{E61A13F5-9737-486D-ABA2-FFCBDFC230BB}"/>
               </a:ext>
             </a:extLst>
           </p:cNvPr>
@@ -11372,7 +11367,7 @@
           <p:cNvPr id="10" name="">
             <a:extLst xmlns:a="http://schemas.openxmlformats.org/drawingml/2006/main">
               <a:ext uri="{FF2B5EF4-FFF2-40B4-BE49-F238E27FC236}">
-                <a16:creationId xmlns:a16="http://schemas.microsoft.com/office/drawing/2014/main" id="{677B4962-01E7-40DE-BC9E-26DE57CA5BFE}"/>
+                <a16:creationId xmlns:a16="http://schemas.microsoft.com/office/drawing/2014/main" id="{C6D59D63-2C69-4CF0-A329-536F853DA7D2}"/>
               </a:ext>
             </a:extLst>
           </p:cNvPr>
@@ -11439,7 +11434,7 @@
           <p:cNvPr id="11" name="">
             <a:extLst xmlns:a="http://schemas.openxmlformats.org/drawingml/2006/main">
               <a:ext uri="{FF2B5EF4-FFF2-40B4-BE49-F238E27FC236}">
-                <a16:creationId xmlns:a16="http://schemas.microsoft.com/office/drawing/2014/main" id="{088FFDD5-246B-4F46-85BB-40156370F7F0}"/>
+                <a16:creationId xmlns:a16="http://schemas.microsoft.com/office/drawing/2014/main" id="{715C31A2-7412-4AE8-BFC1-4B3016D8328F}"/>
               </a:ext>
             </a:extLst>
           </p:cNvPr>
@@ -11489,7 +11484,7 @@
           <p:cNvPr id="12" name="">
             <a:extLst xmlns:a="http://schemas.openxmlformats.org/drawingml/2006/main">
               <a:ext uri="{FF2B5EF4-FFF2-40B4-BE49-F238E27FC236}">
-                <a16:creationId xmlns:a16="http://schemas.microsoft.com/office/drawing/2014/main" id="{86784248-3DC1-4E02-9C94-FAB8786D13E1}"/>
+                <a16:creationId xmlns:a16="http://schemas.microsoft.com/office/drawing/2014/main" id="{E9DB75C8-237D-4074-B109-1F34B3A1A30C}"/>
               </a:ext>
             </a:extLst>
           </p:cNvPr>
@@ -11543,7 +11538,7 @@
           <p:cNvPr id="13" name="">
             <a:extLst xmlns:a="http://schemas.openxmlformats.org/drawingml/2006/main">
               <a:ext uri="{FF2B5EF4-FFF2-40B4-BE49-F238E27FC236}">
-                <a16:creationId xmlns:a16="http://schemas.microsoft.com/office/drawing/2014/main" id="{CF29E385-FD28-4F32-B3CC-09D359A607DD}"/>
+                <a16:creationId xmlns:a16="http://schemas.microsoft.com/office/drawing/2014/main" id="{85566051-669A-4567-B320-29BA37D1968F}"/>
               </a:ext>
             </a:extLst>
           </p:cNvPr>
@@ -11555,7 +11550,7 @@
         <p:spPr>
           <a:xfrm xmlns:a="http://schemas.openxmlformats.org/drawingml/2006/main">
             <a:off x="2724150" y="5314950"/>
-            <a:ext cx="4629150" cy="342900"/>
+            <a:ext cx="5715000" cy="342900"/>
           </a:xfrm>
           <a:prstGeom xmlns:a="http://schemas.openxmlformats.org/drawingml/2006/main" prst="rect">
             <a:avLst/>
@@ -11583,7 +11578,7 @@
                   <a:srgbClr val="FFFFFF"/>
                 </a:solidFill>
               </a:rPr>
-              <a:t>Next: capture verified results and footage after Gate B.</a:t>
+              <a:t>Next: Gate B, 6-hour freeze, browser capture, two human reviews.</a:t>
             </a:r>
           </a:p>
         </p:txBody>
@@ -11591,7 +11586,7 @@
     </p:spTree>
     <p:extLst>
       <p:ext uri="{BB962C8B-B14F-4D97-AF65-F5344CB8AC3E}">
-        <p14:creationId xmlns:p14="http://schemas.microsoft.com/office/powerpoint/2010/main" val="1524498413"/>
+        <p14:creationId xmlns:p14="http://schemas.microsoft.com/office/powerpoint/2010/main" val="805489014"/>
       </p:ext>
     </p:extLst>
   </p:cSld>
